--- a/output/wordlabs-rupt-3day.pptx
+++ b/output/wordlabs-rupt-3day.pptx
@@ -4240,7 +4240,7 @@
                 <a:ea typeface="Calibri" pitchFamily="34" charset="-122"/>
                 <a:cs typeface="Calibri" pitchFamily="34" charset="-120"/>
               </a:rPr>
-              <a:t>"break, burst, force through"</a:t>
+              <a:t>"break, burst, or shatter"</a:t>
             </a:r>
             <a:endParaRPr lang="en-US" sz="2200" dirty="0"/>
           </a:p>
@@ -5288,7 +5288,7 @@
                 <a:ea typeface="Calibri" pitchFamily="34" charset="-122"/>
                 <a:cs typeface="Calibri" pitchFamily="34" charset="-120"/>
               </a:rPr>
-              <a:t>Word Labs  •  wordlabs.app  •  Root: 'rupt' = break, burst, force through</a:t>
+              <a:t>Word Labs  •  wordlabs.app  •  Root: 'rupt' = break, burst, or shatter</a:t>
             </a:r>
             <a:endParaRPr lang="en-US" sz="800" dirty="0"/>
           </a:p>
@@ -5622,7 +5622,7 @@
                 <a:ea typeface="Trebuchet MS" pitchFamily="34" charset="-122"/>
                 <a:cs typeface="Trebuchet MS" pitchFamily="34" charset="-120"/>
               </a:rPr>
-              <a:t>0</a:t>
+              <a:t>1</a:t>
             </a:r>
             <a:pPr algn="ctr" indent="0" marL="0">
               <a:buNone/>
@@ -5928,7 +5928,7 @@
                 <a:ea typeface="Calibri" pitchFamily="34" charset="-122"/>
                 <a:cs typeface="Calibri" pitchFamily="34" charset="-120"/>
               </a:rPr>
-              <a:t>Word Labs  •  wordlabs.app  •  Root: 'rupt' = break, burst, force through</a:t>
+              <a:t>Word Labs  •  wordlabs.app  •  Root: 'rupt' = break, burst, or shatter</a:t>
             </a:r>
             <a:endParaRPr lang="en-US" sz="800" dirty="0"/>
           </a:p>
@@ -6040,7 +6040,7 @@
                 <a:ea typeface="Calibri" pitchFamily="34" charset="-122"/>
                 <a:cs typeface="Calibri" pitchFamily="34" charset="-120"/>
               </a:rPr>
-              <a:t>The sudden </a:t>
+              <a:t>The loud thunderstorm caused a </a:t>
             </a:r>
             <a:pPr algn="l" indent="0" marL="0">
               <a:buNone/>
@@ -6057,7 +6057,7 @@
                 <a:ea typeface="Calibri" pitchFamily="34" charset="-122"/>
                 <a:cs typeface="Calibri" pitchFamily="34" charset="-120"/>
               </a:rPr>
-              <a:t>eruption</a:t>
+              <a:t>disruption</a:t>
             </a:r>
             <a:pPr algn="l" indent="0" marL="0">
               <a:buNone/>
@@ -6071,7 +6071,7 @@
                 <a:ea typeface="Calibri" pitchFamily="34" charset="-122"/>
                 <a:cs typeface="Calibri" pitchFamily="34" charset="-120"/>
               </a:rPr>
-              <a:t> of the volcano caused the scientists to </a:t>
+              <a:t> to our lesson, so our teacher asked us not to </a:t>
             </a:r>
             <a:pPr algn="l" indent="0" marL="0">
               <a:buNone/>
@@ -6102,7 +6102,7 @@
                 <a:ea typeface="Calibri" pitchFamily="34" charset="-122"/>
                 <a:cs typeface="Calibri" pitchFamily="34" charset="-120"/>
               </a:rPr>
-              <a:t> their experiment immediately.</a:t>
+              <a:t> while she gave new instructions.</a:t>
             </a:r>
             <a:endParaRPr lang="en-US" sz="1800" dirty="0"/>
           </a:p>
@@ -6257,7 +6257,7 @@
                 <a:ea typeface="Trebuchet MS" pitchFamily="34" charset="-122"/>
                 <a:cs typeface="Trebuchet MS" pitchFamily="34" charset="-120"/>
               </a:rPr>
-              <a:t>eruption</a:t>
+              <a:t>disruption</a:t>
             </a:r>
             <a:endParaRPr lang="en-US" sz="1400" dirty="0"/>
           </a:p>
@@ -6716,7 +6716,7 @@
                 <a:ea typeface="Calibri" pitchFamily="34" charset="-122"/>
                 <a:cs typeface="Calibri" pitchFamily="34" charset="-120"/>
               </a:rPr>
-              <a:t>Word Labs  •  wordlabs.app  •  Root: 'rupt' = break, burst, force through</a:t>
+              <a:t>Word Labs  •  wordlabs.app  •  Root: 'rupt' = break, burst, or shatter</a:t>
             </a:r>
             <a:endParaRPr lang="en-US" sz="800" dirty="0"/>
           </a:p>
@@ -6855,7 +6855,7 @@
                 <a:ea typeface="Trebuchet MS" pitchFamily="34" charset="-122"/>
                 <a:cs typeface="Trebuchet MS" pitchFamily="34" charset="-120"/>
               </a:rPr>
-              <a:t>eruption</a:t>
+              <a:t>disruption</a:t>
             </a:r>
             <a:endParaRPr lang="en-US" sz="2800" dirty="0"/>
           </a:p>
@@ -7543,7 +7543,7 @@
                 <a:ea typeface="Calibri" pitchFamily="34" charset="-122"/>
                 <a:cs typeface="Calibri" pitchFamily="34" charset="-120"/>
               </a:rPr>
-              <a:t>Word Labs  •  wordlabs.app  •  Root: 'rupt' = break, burst, force through</a:t>
+              <a:t>Word Labs  •  wordlabs.app  •  Root: 'rupt' = break, burst, or shatter</a:t>
             </a:r>
             <a:endParaRPr lang="en-US" sz="800" dirty="0"/>
           </a:p>
@@ -7682,7 +7682,7 @@
                 <a:ea typeface="Trebuchet MS" pitchFamily="34" charset="-122"/>
                 <a:cs typeface="Trebuchet MS" pitchFamily="34" charset="-120"/>
               </a:rPr>
-              <a:t>eruption</a:t>
+              <a:t>disruption</a:t>
             </a:r>
             <a:endParaRPr lang="en-US" sz="2800" dirty="0"/>
           </a:p>
@@ -7821,7 +7821,7 @@
                 <a:ea typeface="Trebuchet MS" pitchFamily="34" charset="-122"/>
                 <a:cs typeface="Trebuchet MS" pitchFamily="34" charset="-120"/>
               </a:rPr>
-              <a:t>e</a:t>
+              <a:t>dis</a:t>
             </a:r>
             <a:endParaRPr lang="en-US" sz="1300" dirty="0"/>
           </a:p>
@@ -7860,7 +7860,7 @@
                 <a:ea typeface="Calibri" pitchFamily="34" charset="-122"/>
                 <a:cs typeface="Calibri" pitchFamily="34" charset="-120"/>
               </a:rPr>
-              <a:t>out, away</a:t>
+              <a:t>apart, away</a:t>
             </a:r>
             <a:endParaRPr lang="en-US" sz="850" dirty="0"/>
           </a:p>
@@ -8084,7 +8084,7 @@
                 <a:ea typeface="Calibri" pitchFamily="34" charset="-122"/>
                 <a:cs typeface="Calibri" pitchFamily="34" charset="-120"/>
               </a:rPr>
-              <a:t>act or process of</a:t>
+              <a:t>act or state of</a:t>
             </a:r>
             <a:endParaRPr lang="en-US" sz="850" dirty="0"/>
           </a:p>
@@ -8640,7 +8640,7 @@
                 <a:ea typeface="Calibri" pitchFamily="34" charset="-122"/>
                 <a:cs typeface="Calibri" pitchFamily="34" charset="-120"/>
               </a:rPr>
-              <a:t>Word Labs  •  wordlabs.app  •  Root: 'rupt' = break, burst, force through</a:t>
+              <a:t>Word Labs  •  wordlabs.app  •  Root: 'rupt' = break, burst, or shatter</a:t>
             </a:r>
             <a:endParaRPr lang="en-US" sz="800" dirty="0"/>
           </a:p>
@@ -8779,7 +8779,7 @@
                 <a:ea typeface="Trebuchet MS" pitchFamily="34" charset="-122"/>
                 <a:cs typeface="Trebuchet MS" pitchFamily="34" charset="-120"/>
               </a:rPr>
-              <a:t>eruption</a:t>
+              <a:t>disruption</a:t>
             </a:r>
             <a:endParaRPr lang="en-US" sz="2800" dirty="0"/>
           </a:p>
@@ -8918,7 +8918,7 @@
                 <a:ea typeface="Trebuchet MS" pitchFamily="34" charset="-122"/>
                 <a:cs typeface="Trebuchet MS" pitchFamily="34" charset="-120"/>
               </a:rPr>
-              <a:t>e</a:t>
+              <a:t>dis</a:t>
             </a:r>
             <a:endParaRPr lang="en-US" sz="1300" dirty="0"/>
           </a:p>
@@ -8957,7 +8957,7 @@
                 <a:ea typeface="Calibri" pitchFamily="34" charset="-122"/>
                 <a:cs typeface="Calibri" pitchFamily="34" charset="-120"/>
               </a:rPr>
-              <a:t>out, away</a:t>
+              <a:t>apart, away</a:t>
             </a:r>
             <a:endParaRPr lang="en-US" sz="850" dirty="0"/>
           </a:p>
@@ -9181,7 +9181,7 @@
                 <a:ea typeface="Calibri" pitchFamily="34" charset="-122"/>
                 <a:cs typeface="Calibri" pitchFamily="34" charset="-120"/>
               </a:rPr>
-              <a:t>act or process of</a:t>
+              <a:t>act or state of</a:t>
             </a:r>
             <a:endParaRPr lang="en-US" sz="850" dirty="0"/>
           </a:p>
@@ -9340,7 +9340,7 @@
                 <a:ea typeface="Trebuchet MS" pitchFamily="34" charset="-122"/>
                 <a:cs typeface="Trebuchet MS" pitchFamily="34" charset="-120"/>
               </a:rPr>
-              <a:t>e</a:t>
+              <a:t>dis</a:t>
             </a:r>
             <a:endParaRPr lang="en-US" sz="1400" dirty="0"/>
           </a:p>
@@ -9974,7 +9974,7 @@
                 <a:ea typeface="Calibri" pitchFamily="34" charset="-122"/>
                 <a:cs typeface="Calibri" pitchFamily="34" charset="-120"/>
               </a:rPr>
-              <a:t>Word Labs  •  wordlabs.app  •  Root: 'rupt' = break, burst, force through</a:t>
+              <a:t>Word Labs  •  wordlabs.app  •  Root: 'rupt' = break, burst, or shatter</a:t>
             </a:r>
             <a:endParaRPr lang="en-US" sz="800" dirty="0"/>
           </a:p>
@@ -10113,7 +10113,7 @@
                 <a:ea typeface="Trebuchet MS" pitchFamily="34" charset="-122"/>
                 <a:cs typeface="Trebuchet MS" pitchFamily="34" charset="-120"/>
               </a:rPr>
-              <a:t>eruption</a:t>
+              <a:t>disruption</a:t>
             </a:r>
             <a:endParaRPr lang="en-US" sz="2800" dirty="0"/>
           </a:p>
@@ -10252,7 +10252,7 @@
                 <a:ea typeface="Trebuchet MS" pitchFamily="34" charset="-122"/>
                 <a:cs typeface="Trebuchet MS" pitchFamily="34" charset="-120"/>
               </a:rPr>
-              <a:t>e</a:t>
+              <a:t>dis</a:t>
             </a:r>
             <a:endParaRPr lang="en-US" sz="1300" dirty="0"/>
           </a:p>
@@ -10291,7 +10291,7 @@
                 <a:ea typeface="Calibri" pitchFamily="34" charset="-122"/>
                 <a:cs typeface="Calibri" pitchFamily="34" charset="-120"/>
               </a:rPr>
-              <a:t>out, away</a:t>
+              <a:t>apart, away</a:t>
             </a:r>
             <a:endParaRPr lang="en-US" sz="850" dirty="0"/>
           </a:p>
@@ -10515,7 +10515,7 @@
                 <a:ea typeface="Calibri" pitchFamily="34" charset="-122"/>
                 <a:cs typeface="Calibri" pitchFamily="34" charset="-120"/>
               </a:rPr>
-              <a:t>act or process of</a:t>
+              <a:t>act or state of</a:t>
             </a:r>
             <a:endParaRPr lang="en-US" sz="850" dirty="0"/>
           </a:p>
@@ -10674,7 +10674,7 @@
                 <a:ea typeface="Trebuchet MS" pitchFamily="34" charset="-122"/>
                 <a:cs typeface="Trebuchet MS" pitchFamily="34" charset="-120"/>
               </a:rPr>
-              <a:t>e</a:t>
+              <a:t>dis</a:t>
             </a:r>
             <a:endParaRPr lang="en-US" sz="1400" dirty="0"/>
           </a:p>
@@ -10965,11 +10965,11 @@
         <p:spPr>
           <a:xfrm>
             <a:off x="1874520" y="4096512"/>
-            <a:ext cx="6903720" cy="658368"/>
+            <a:ext cx="6903720" cy="804672"/>
           </a:xfrm>
           <a:prstGeom prst="rect">
             <a:avLst>
-              <a:gd name="adj" fmla="val 8333"/>
+              <a:gd name="adj" fmla="val 6818"/>
             </a:avLst>
           </a:prstGeom>
           <a:solidFill>
@@ -10991,12 +10991,12 @@
         </p:nvSpPr>
         <p:spPr>
           <a:xfrm>
-            <a:off x="2124837" y="4169664"/>
-            <a:ext cx="685800" cy="475488"/>
+            <a:off x="1951330" y="4169664"/>
+            <a:ext cx="676656" cy="384048"/>
           </a:xfrm>
           <a:prstGeom prst="rect">
             <a:avLst>
-              <a:gd name="adj" fmla="val 7692"/>
+              <a:gd name="adj" fmla="val 9524"/>
             </a:avLst>
           </a:prstGeom>
           <a:solidFill>
@@ -11018,8 +11018,8 @@
         </p:nvSpPr>
         <p:spPr>
           <a:xfrm>
-            <a:off x="2124837" y="4169664"/>
-            <a:ext cx="685800" cy="475488"/>
+            <a:off x="1951330" y="4169664"/>
+            <a:ext cx="676656" cy="384048"/>
           </a:xfrm>
           <a:prstGeom prst="rect">
             <a:avLst/>
@@ -11043,7 +11043,7 @@
                 <a:ea typeface="Trebuchet MS" pitchFamily="34" charset="-122"/>
                 <a:cs typeface="Trebuchet MS" pitchFamily="34" charset="-120"/>
               </a:rPr>
-              <a:t>e</a:t>
+              <a:t>d</a:t>
             </a:r>
             <a:endParaRPr lang="en-US" sz="900" dirty="0"/>
           </a:p>
@@ -11057,12 +11057,12 @@
         </p:nvSpPr>
         <p:spPr>
           <a:xfrm>
-            <a:off x="3033522" y="4169664"/>
-            <a:ext cx="685800" cy="475488"/>
+            <a:off x="2677363" y="4169664"/>
+            <a:ext cx="676656" cy="384048"/>
           </a:xfrm>
           <a:prstGeom prst="rect">
             <a:avLst>
-              <a:gd name="adj" fmla="val 7692"/>
+              <a:gd name="adj" fmla="val 9524"/>
             </a:avLst>
           </a:prstGeom>
           <a:solidFill>
@@ -11084,8 +11084,8 @@
         </p:nvSpPr>
         <p:spPr>
           <a:xfrm>
-            <a:off x="3033522" y="4169664"/>
-            <a:ext cx="685800" cy="475488"/>
+            <a:off x="2677363" y="4169664"/>
+            <a:ext cx="676656" cy="384048"/>
           </a:xfrm>
           <a:prstGeom prst="rect">
             <a:avLst/>
@@ -11109,7 +11109,7 @@
                 <a:ea typeface="Trebuchet MS" pitchFamily="34" charset="-122"/>
                 <a:cs typeface="Trebuchet MS" pitchFamily="34" charset="-120"/>
               </a:rPr>
-              <a:t>r</a:t>
+              <a:t>i</a:t>
             </a:r>
             <a:endParaRPr lang="en-US" sz="900" dirty="0"/>
           </a:p>
@@ -11123,12 +11123,12 @@
         </p:nvSpPr>
         <p:spPr>
           <a:xfrm>
-            <a:off x="3942207" y="4169664"/>
-            <a:ext cx="685800" cy="475488"/>
+            <a:off x="3403397" y="4169664"/>
+            <a:ext cx="676656" cy="384048"/>
           </a:xfrm>
           <a:prstGeom prst="rect">
             <a:avLst>
-              <a:gd name="adj" fmla="val 7692"/>
+              <a:gd name="adj" fmla="val 9524"/>
             </a:avLst>
           </a:prstGeom>
           <a:solidFill>
@@ -11150,8 +11150,8 @@
         </p:nvSpPr>
         <p:spPr>
           <a:xfrm>
-            <a:off x="3942207" y="4169664"/>
-            <a:ext cx="685800" cy="475488"/>
+            <a:off x="3403397" y="4169664"/>
+            <a:ext cx="676656" cy="384048"/>
           </a:xfrm>
           <a:prstGeom prst="rect">
             <a:avLst/>
@@ -11175,7 +11175,7 @@
                 <a:ea typeface="Trebuchet MS" pitchFamily="34" charset="-122"/>
                 <a:cs typeface="Trebuchet MS" pitchFamily="34" charset="-120"/>
               </a:rPr>
-              <a:t>u</a:t>
+              <a:t>s</a:t>
             </a:r>
             <a:endParaRPr lang="en-US" sz="900" dirty="0"/>
           </a:p>
@@ -11189,12 +11189,12 @@
         </p:nvSpPr>
         <p:spPr>
           <a:xfrm>
-            <a:off x="4850892" y="4169664"/>
-            <a:ext cx="685800" cy="475488"/>
+            <a:off x="4129430" y="4169664"/>
+            <a:ext cx="676656" cy="384048"/>
           </a:xfrm>
           <a:prstGeom prst="rect">
             <a:avLst>
-              <a:gd name="adj" fmla="val 7692"/>
+              <a:gd name="adj" fmla="val 9524"/>
             </a:avLst>
           </a:prstGeom>
           <a:solidFill>
@@ -11216,8 +11216,8 @@
         </p:nvSpPr>
         <p:spPr>
           <a:xfrm>
-            <a:off x="4850892" y="4169664"/>
-            <a:ext cx="685800" cy="475488"/>
+            <a:off x="4129430" y="4169664"/>
+            <a:ext cx="676656" cy="384048"/>
           </a:xfrm>
           <a:prstGeom prst="rect">
             <a:avLst/>
@@ -11241,7 +11241,7 @@
                 <a:ea typeface="Trebuchet MS" pitchFamily="34" charset="-122"/>
                 <a:cs typeface="Trebuchet MS" pitchFamily="34" charset="-120"/>
               </a:rPr>
-              <a:t>p</a:t>
+              <a:t>r</a:t>
             </a:r>
             <a:endParaRPr lang="en-US" sz="900" dirty="0"/>
           </a:p>
@@ -11255,12 +11255,12 @@
         </p:nvSpPr>
         <p:spPr>
           <a:xfrm>
-            <a:off x="5759577" y="4169664"/>
-            <a:ext cx="685800" cy="475488"/>
+            <a:off x="4855464" y="4169664"/>
+            <a:ext cx="676656" cy="384048"/>
           </a:xfrm>
           <a:prstGeom prst="rect">
             <a:avLst>
-              <a:gd name="adj" fmla="val 7692"/>
+              <a:gd name="adj" fmla="val 9524"/>
             </a:avLst>
           </a:prstGeom>
           <a:solidFill>
@@ -11282,8 +11282,8 @@
         </p:nvSpPr>
         <p:spPr>
           <a:xfrm>
-            <a:off x="5759577" y="4169664"/>
-            <a:ext cx="685800" cy="475488"/>
+            <a:off x="4855464" y="4169664"/>
+            <a:ext cx="676656" cy="384048"/>
           </a:xfrm>
           <a:prstGeom prst="rect">
             <a:avLst/>
@@ -11307,7 +11307,7 @@
                 <a:ea typeface="Trebuchet MS" pitchFamily="34" charset="-122"/>
                 <a:cs typeface="Trebuchet MS" pitchFamily="34" charset="-120"/>
               </a:rPr>
-              <a:t>t</a:t>
+              <a:t>u</a:t>
             </a:r>
             <a:endParaRPr lang="en-US" sz="900" dirty="0"/>
           </a:p>
@@ -11321,12 +11321,12 @@
         </p:nvSpPr>
         <p:spPr>
           <a:xfrm>
-            <a:off x="6668262" y="4169664"/>
-            <a:ext cx="685800" cy="475488"/>
+            <a:off x="5581498" y="4169664"/>
+            <a:ext cx="676656" cy="384048"/>
           </a:xfrm>
           <a:prstGeom prst="rect">
             <a:avLst>
-              <a:gd name="adj" fmla="val 7692"/>
+              <a:gd name="adj" fmla="val 9524"/>
             </a:avLst>
           </a:prstGeom>
           <a:solidFill>
@@ -11348,8 +11348,8 @@
         </p:nvSpPr>
         <p:spPr>
           <a:xfrm>
-            <a:off x="6668262" y="4169664"/>
-            <a:ext cx="685800" cy="475488"/>
+            <a:off x="5581498" y="4169664"/>
+            <a:ext cx="676656" cy="384048"/>
           </a:xfrm>
           <a:prstGeom prst="rect">
             <a:avLst/>
@@ -11373,7 +11373,7 @@
                 <a:ea typeface="Trebuchet MS" pitchFamily="34" charset="-122"/>
                 <a:cs typeface="Trebuchet MS" pitchFamily="34" charset="-120"/>
               </a:rPr>
-              <a:t>i</a:t>
+              <a:t>p</a:t>
             </a:r>
             <a:endParaRPr lang="en-US" sz="900" dirty="0"/>
           </a:p>
@@ -11387,12 +11387,12 @@
         </p:nvSpPr>
         <p:spPr>
           <a:xfrm>
-            <a:off x="7576947" y="4169664"/>
-            <a:ext cx="685800" cy="475488"/>
+            <a:off x="6307531" y="4169664"/>
+            <a:ext cx="676656" cy="384048"/>
           </a:xfrm>
           <a:prstGeom prst="rect">
             <a:avLst>
-              <a:gd name="adj" fmla="val 7692"/>
+              <a:gd name="adj" fmla="val 9524"/>
             </a:avLst>
           </a:prstGeom>
           <a:solidFill>
@@ -11414,8 +11414,8 @@
         </p:nvSpPr>
         <p:spPr>
           <a:xfrm>
-            <a:off x="7576947" y="4169664"/>
-            <a:ext cx="685800" cy="475488"/>
+            <a:off x="6307531" y="4169664"/>
+            <a:ext cx="676656" cy="384048"/>
           </a:xfrm>
           <a:prstGeom prst="rect">
             <a:avLst/>
@@ -11439,7 +11439,178 @@
                 <a:ea typeface="Trebuchet MS" pitchFamily="34" charset="-122"/>
                 <a:cs typeface="Trebuchet MS" pitchFamily="34" charset="-120"/>
               </a:rPr>
-              <a:t>on</a:t>
+              <a:t>t</a:t>
+            </a:r>
+            <a:endParaRPr lang="en-US" sz="900" dirty="0"/>
+          </a:p>
+        </p:txBody>
+      </p:sp>
+      <p:sp>
+        <p:nvSpPr>
+          <p:cNvPr id="53" name="Text 51"/>
+          <p:cNvSpPr/>
+          <p:nvPr/>
+        </p:nvSpPr>
+        <p:spPr>
+          <a:xfrm>
+            <a:off x="6307531" y="4572000"/>
+            <a:ext cx="676656" cy="219456"/>
+          </a:xfrm>
+          <a:prstGeom prst="rect">
+            <a:avLst/>
+          </a:prstGeom>
+          <a:noFill/>
+          <a:ln/>
+        </p:spPr>
+        <p:txBody>
+          <a:bodyPr wrap="square" lIns="0" tIns="0" rIns="0" bIns="0" rtlCol="0" anchor="t"/>
+          <a:lstStyle/>
+          <a:p>
+            <a:pPr algn="ctr" indent="0" marL="0">
+              <a:buNone/>
+            </a:pPr>
+            <a:r>
+              <a:rPr lang="en-US" sz="750" i="1" dirty="0">
+                <a:solidFill>
+                  <a:srgbClr val="94A3B8"/>
+                </a:solidFill>
+                <a:latin typeface="Calibri" pitchFamily="34" charset="0"/>
+                <a:ea typeface="Calibri" pitchFamily="34" charset="-122"/>
+                <a:cs typeface="Calibri" pitchFamily="34" charset="-120"/>
+              </a:rPr>
+              <a:t>/sh/</a:t>
+            </a:r>
+            <a:endParaRPr lang="en-US" sz="750" dirty="0"/>
+          </a:p>
+        </p:txBody>
+      </p:sp>
+      <p:sp>
+        <p:nvSpPr>
+          <p:cNvPr id="54" name="Shape 52"/>
+          <p:cNvSpPr/>
+          <p:nvPr/>
+        </p:nvSpPr>
+        <p:spPr>
+          <a:xfrm>
+            <a:off x="7033565" y="4169664"/>
+            <a:ext cx="676656" cy="384048"/>
+          </a:xfrm>
+          <a:prstGeom prst="rect">
+            <a:avLst>
+              <a:gd name="adj" fmla="val 9524"/>
+            </a:avLst>
+          </a:prstGeom>
+          <a:solidFill>
+            <a:srgbClr val="FFFFFF"/>
+          </a:solidFill>
+          <a:ln w="12700">
+            <a:solidFill>
+              <a:srgbClr val="DB2777"/>
+            </a:solidFill>
+            <a:prstDash val="solid"/>
+          </a:ln>
+        </p:spPr>
+      </p:sp>
+      <p:sp>
+        <p:nvSpPr>
+          <p:cNvPr id="55" name="Text 53"/>
+          <p:cNvSpPr/>
+          <p:nvPr/>
+        </p:nvSpPr>
+        <p:spPr>
+          <a:xfrm>
+            <a:off x="7033565" y="4169664"/>
+            <a:ext cx="676656" cy="384048"/>
+          </a:xfrm>
+          <a:prstGeom prst="rect">
+            <a:avLst/>
+          </a:prstGeom>
+          <a:noFill/>
+          <a:ln/>
+        </p:spPr>
+        <p:txBody>
+          <a:bodyPr wrap="square" lIns="0" tIns="0" rIns="0" bIns="0" rtlCol="0" anchor="ctr"/>
+          <a:lstStyle/>
+          <a:p>
+            <a:pPr algn="ctr" indent="0" marL="0">
+              <a:buNone/>
+            </a:pPr>
+            <a:r>
+              <a:rPr lang="en-US" sz="900" b="1" dirty="0">
+                <a:solidFill>
+                  <a:srgbClr val="9D174D"/>
+                </a:solidFill>
+                <a:latin typeface="Trebuchet MS" pitchFamily="34" charset="0"/>
+                <a:ea typeface="Trebuchet MS" pitchFamily="34" charset="-122"/>
+                <a:cs typeface="Trebuchet MS" pitchFamily="34" charset="-120"/>
+              </a:rPr>
+              <a:t>io</a:t>
+            </a:r>
+            <a:endParaRPr lang="en-US" sz="900" dirty="0"/>
+          </a:p>
+        </p:txBody>
+      </p:sp>
+      <p:sp>
+        <p:nvSpPr>
+          <p:cNvPr id="56" name="Shape 54"/>
+          <p:cNvSpPr/>
+          <p:nvPr/>
+        </p:nvSpPr>
+        <p:spPr>
+          <a:xfrm>
+            <a:off x="7759598" y="4169664"/>
+            <a:ext cx="676656" cy="384048"/>
+          </a:xfrm>
+          <a:prstGeom prst="rect">
+            <a:avLst>
+              <a:gd name="adj" fmla="val 9524"/>
+            </a:avLst>
+          </a:prstGeom>
+          <a:solidFill>
+            <a:srgbClr val="FFFFFF"/>
+          </a:solidFill>
+          <a:ln w="12700">
+            <a:solidFill>
+              <a:srgbClr val="DB2777"/>
+            </a:solidFill>
+            <a:prstDash val="solid"/>
+          </a:ln>
+        </p:spPr>
+      </p:sp>
+      <p:sp>
+        <p:nvSpPr>
+          <p:cNvPr id="57" name="Text 55"/>
+          <p:cNvSpPr/>
+          <p:nvPr/>
+        </p:nvSpPr>
+        <p:spPr>
+          <a:xfrm>
+            <a:off x="7759598" y="4169664"/>
+            <a:ext cx="676656" cy="384048"/>
+          </a:xfrm>
+          <a:prstGeom prst="rect">
+            <a:avLst/>
+          </a:prstGeom>
+          <a:noFill/>
+          <a:ln/>
+        </p:spPr>
+        <p:txBody>
+          <a:bodyPr wrap="square" lIns="0" tIns="0" rIns="0" bIns="0" rtlCol="0" anchor="ctr"/>
+          <a:lstStyle/>
+          <a:p>
+            <a:pPr algn="ctr" indent="0" marL="0">
+              <a:buNone/>
+            </a:pPr>
+            <a:r>
+              <a:rPr lang="en-US" sz="900" b="1" dirty="0">
+                <a:solidFill>
+                  <a:srgbClr val="9D174D"/>
+                </a:solidFill>
+                <a:latin typeface="Trebuchet MS" pitchFamily="34" charset="0"/>
+                <a:ea typeface="Trebuchet MS" pitchFamily="34" charset="-122"/>
+                <a:cs typeface="Trebuchet MS" pitchFamily="34" charset="-120"/>
+              </a:rPr>
+              <a:t>n</a:t>
             </a:r>
             <a:endParaRPr lang="en-US" sz="900" dirty="0"/>
           </a:p>
@@ -11731,7 +11902,7 @@
                 <a:ea typeface="Calibri" pitchFamily="34" charset="-122"/>
                 <a:cs typeface="Calibri" pitchFamily="34" charset="-120"/>
               </a:rPr>
-              <a:t>Word Labs  •  wordlabs.app  •  Root: 'rupt' = break, burst, force through</a:t>
+              <a:t>Word Labs  •  wordlabs.app  •  Root: 'rupt' = break, burst, or shatter</a:t>
             </a:r>
             <a:endParaRPr lang="en-US" sz="800" dirty="0"/>
           </a:p>
@@ -12558,7 +12729,7 @@
                 <a:ea typeface="Calibri" pitchFamily="34" charset="-122"/>
                 <a:cs typeface="Calibri" pitchFamily="34" charset="-120"/>
               </a:rPr>
-              <a:t>Word Labs  •  wordlabs.app  •  Root: 'rupt' = break, burst, force through</a:t>
+              <a:t>Word Labs  •  wordlabs.app  •  Root: 'rupt' = break, burst, or shatter</a:t>
             </a:r>
             <a:endParaRPr lang="en-US" sz="800" dirty="0"/>
           </a:p>
@@ -13543,7 +13714,7 @@
                 <a:ea typeface="Calibri" pitchFamily="34" charset="-122"/>
                 <a:cs typeface="Calibri" pitchFamily="34" charset="-120"/>
               </a:rPr>
-              <a:t>Word Labs  •  wordlabs.app  •  Root: 'rupt' = break, burst, force through</a:t>
+              <a:t>Word Labs  •  wordlabs.app  •  Root: 'rupt' = break, burst, or shatter</a:t>
             </a:r>
             <a:endParaRPr lang="en-US" sz="800" dirty="0"/>
           </a:p>
@@ -14674,7 +14845,7 @@
                 <a:ea typeface="Calibri" pitchFamily="34" charset="-122"/>
                 <a:cs typeface="Calibri" pitchFamily="34" charset="-120"/>
               </a:rPr>
-              <a:t>Root 'rupt' — break, burst, force through</a:t>
+              <a:t>Root 'rupt' — break, burst, or shatter</a:t>
             </a:r>
             <a:endParaRPr lang="en-US" sz="1600" dirty="0"/>
           </a:p>
@@ -15030,7 +15201,7 @@
                 <a:ea typeface="Calibri" pitchFamily="34" charset="-122"/>
                 <a:cs typeface="Calibri" pitchFamily="34" charset="-120"/>
               </a:rPr>
-              <a:t>Word Labs  •  wordlabs.app  •  Root: 'rupt' = break, burst, force through</a:t>
+              <a:t>Word Labs  •  wordlabs.app  •  Root: 'rupt' = break, burst, or shatter</a:t>
             </a:r>
             <a:endParaRPr lang="en-US" sz="800" dirty="0"/>
           </a:p>
@@ -17023,7 +17194,7 @@
                 <a:ea typeface="Calibri" pitchFamily="34" charset="-122"/>
                 <a:cs typeface="Calibri" pitchFamily="34" charset="-120"/>
               </a:rPr>
-              <a:t>Word Labs  •  wordlabs.app  •  Root: 'rupt' = break, burst, force through</a:t>
+              <a:t>Word Labs  •  wordlabs.app  •  Root: 'rupt' = break, burst, or shatter</a:t>
             </a:r>
             <a:endParaRPr lang="en-US" sz="800" dirty="0"/>
           </a:p>
@@ -17663,7 +17834,7 @@
                 <a:ea typeface="Calibri" pitchFamily="34" charset="-122"/>
                 <a:cs typeface="Calibri" pitchFamily="34" charset="-120"/>
               </a:rPr>
-              <a:t>Word Labs  •  wordlabs.app  •  Root: 'rupt' = break, burst, force through</a:t>
+              <a:t>Word Labs  •  wordlabs.app  •  Root: 'rupt' = break, burst, or shatter</a:t>
             </a:r>
             <a:endParaRPr lang="en-US" sz="800" dirty="0"/>
           </a:p>
@@ -17775,7 +17946,7 @@
                 <a:ea typeface="Calibri" pitchFamily="34" charset="-122"/>
                 <a:cs typeface="Calibri" pitchFamily="34" charset="-120"/>
               </a:rPr>
-              <a:t>The </a:t>
+              <a:t>When the volcano started to </a:t>
             </a:r>
             <a:pPr algn="l" indent="0" marL="0">
               <a:buNone/>
@@ -17792,7 +17963,7 @@
                 <a:ea typeface="Calibri" pitchFamily="34" charset="-122"/>
                 <a:cs typeface="Calibri" pitchFamily="34" charset="-120"/>
               </a:rPr>
-              <a:t>corrupt</a:t>
+              <a:t>erupt</a:t>
             </a:r>
             <a:pPr algn="l" indent="0" marL="0">
               <a:buNone/>
@@ -17806,7 +17977,7 @@
                 <a:ea typeface="Calibri" pitchFamily="34" charset="-122"/>
                 <a:cs typeface="Calibri" pitchFamily="34" charset="-120"/>
               </a:rPr>
-              <a:t> official tried to </a:t>
+              <a:t>, the </a:t>
             </a:r>
             <a:pPr algn="l" indent="0" marL="0">
               <a:buNone/>
@@ -17823,7 +17994,7 @@
                 <a:ea typeface="Calibri" pitchFamily="34" charset="-122"/>
                 <a:cs typeface="Calibri" pitchFamily="34" charset="-120"/>
               </a:rPr>
-              <a:t>disrupt</a:t>
+              <a:t>corrupt</a:t>
             </a:r>
             <a:pPr algn="l" indent="0" marL="0">
               <a:buNone/>
@@ -17837,7 +18008,7 @@
                 <a:ea typeface="Calibri" pitchFamily="34" charset="-122"/>
                 <a:cs typeface="Calibri" pitchFamily="34" charset="-120"/>
               </a:rPr>
-              <a:t> the meeting, but his </a:t>
+              <a:t> official finally made an </a:t>
             </a:r>
             <a:pPr algn="l" indent="0" marL="0">
               <a:buNone/>
@@ -17868,7 +18039,7 @@
                 <a:ea typeface="Calibri" pitchFamily="34" charset="-122"/>
                 <a:cs typeface="Calibri" pitchFamily="34" charset="-120"/>
               </a:rPr>
-              <a:t> behaviour shocked everyone in the room.</a:t>
+              <a:t> decision to evacuate the town.</a:t>
             </a:r>
             <a:endParaRPr lang="en-US" sz="1800" dirty="0"/>
           </a:p>
@@ -18023,7 +18194,7 @@
                 <a:ea typeface="Trebuchet MS" pitchFamily="34" charset="-122"/>
                 <a:cs typeface="Trebuchet MS" pitchFamily="34" charset="-120"/>
               </a:rPr>
-              <a:t>corrupt</a:t>
+              <a:t>erupt</a:t>
             </a:r>
             <a:endParaRPr lang="en-US" sz="1400" dirty="0"/>
           </a:p>
@@ -18151,7 +18322,7 @@
                 <a:ea typeface="Trebuchet MS" pitchFamily="34" charset="-122"/>
                 <a:cs typeface="Trebuchet MS" pitchFamily="34" charset="-120"/>
               </a:rPr>
-              <a:t>disrupt</a:t>
+              <a:t>corrupt</a:t>
             </a:r>
             <a:endParaRPr lang="en-US" sz="1400" dirty="0"/>
           </a:p>
@@ -18610,7 +18781,7 @@
                 <a:ea typeface="Calibri" pitchFamily="34" charset="-122"/>
                 <a:cs typeface="Calibri" pitchFamily="34" charset="-120"/>
               </a:rPr>
-              <a:t>Word Labs  •  wordlabs.app  •  Root: 'rupt' = break, burst, force through</a:t>
+              <a:t>Word Labs  •  wordlabs.app  •  Root: 'rupt' = break, burst, or shatter</a:t>
             </a:r>
             <a:endParaRPr lang="en-US" sz="800" dirty="0"/>
           </a:p>
@@ -18749,7 +18920,7 @@
                 <a:ea typeface="Trebuchet MS" pitchFamily="34" charset="-122"/>
                 <a:cs typeface="Trebuchet MS" pitchFamily="34" charset="-120"/>
               </a:rPr>
-              <a:t>corrupt</a:t>
+              <a:t>erupt</a:t>
             </a:r>
             <a:endParaRPr lang="en-US" sz="2800" dirty="0"/>
           </a:p>
@@ -19437,7 +19608,7 @@
                 <a:ea typeface="Calibri" pitchFamily="34" charset="-122"/>
                 <a:cs typeface="Calibri" pitchFamily="34" charset="-120"/>
               </a:rPr>
-              <a:t>Word Labs  •  wordlabs.app  •  Root: 'rupt' = break, burst, force through</a:t>
+              <a:t>Word Labs  •  wordlabs.app  •  Root: 'rupt' = break, burst, or shatter</a:t>
             </a:r>
             <a:endParaRPr lang="en-US" sz="800" dirty="0"/>
           </a:p>
@@ -19576,7 +19747,7 @@
                 <a:ea typeface="Trebuchet MS" pitchFamily="34" charset="-122"/>
                 <a:cs typeface="Trebuchet MS" pitchFamily="34" charset="-120"/>
               </a:rPr>
-              <a:t>corrupt</a:t>
+              <a:t>erupt</a:t>
             </a:r>
             <a:endParaRPr lang="en-US" sz="2800" dirty="0"/>
           </a:p>
@@ -19715,7 +19886,7 @@
                 <a:ea typeface="Trebuchet MS" pitchFamily="34" charset="-122"/>
                 <a:cs typeface="Trebuchet MS" pitchFamily="34" charset="-120"/>
               </a:rPr>
-              <a:t>cor</a:t>
+              <a:t>e</a:t>
             </a:r>
             <a:endParaRPr lang="en-US" sz="1300" dirty="0"/>
           </a:p>
@@ -19754,7 +19925,7 @@
                 <a:ea typeface="Calibri" pitchFamily="34" charset="-122"/>
                 <a:cs typeface="Calibri" pitchFamily="34" charset="-120"/>
               </a:rPr>
-              <a:t>together, completely</a:t>
+              <a:t>out, from</a:t>
             </a:r>
             <a:endParaRPr lang="en-US" sz="850" dirty="0"/>
           </a:p>
@@ -19762,46 +19933,7 @@
       </p:sp>
       <p:sp>
         <p:nvSpPr>
-          <p:cNvPr id="19" name="Text 17"/>
-          <p:cNvSpPr/>
-          <p:nvPr/>
-        </p:nvSpPr>
-        <p:spPr>
-          <a:xfrm>
-            <a:off x="2938272" y="2752344"/>
-            <a:ext cx="1828800" cy="182880"/>
-          </a:xfrm>
-          <a:prstGeom prst="rect">
-            <a:avLst/>
-          </a:prstGeom>
-          <a:noFill/>
-          <a:ln/>
-        </p:spPr>
-        <p:txBody>
-          <a:bodyPr wrap="square" lIns="0" tIns="0" rIns="0" bIns="0" rtlCol="0" anchor="t"/>
-          <a:lstStyle/>
-          <a:p>
-            <a:pPr algn="ctr" indent="0" marL="0">
-              <a:buNone/>
-            </a:pPr>
-            <a:r>
-              <a:rPr lang="en-US" sz="700" i="1" dirty="0">
-                <a:solidFill>
-                  <a:srgbClr val="94A3B8"/>
-                </a:solidFill>
-                <a:latin typeface="Calibri" pitchFamily="34" charset="0"/>
-                <a:ea typeface="Calibri" pitchFamily="34" charset="-122"/>
-                <a:cs typeface="Calibri" pitchFamily="34" charset="-120"/>
-              </a:rPr>
-              <a:t>con → cor before 'r'</a:t>
-            </a:r>
-            <a:endParaRPr lang="en-US" sz="700" dirty="0"/>
-          </a:p>
-        </p:txBody>
-      </p:sp>
-      <p:sp>
-        <p:nvSpPr>
-          <p:cNvPr id="20" name="Shape 18"/>
+          <p:cNvPr id="19" name="Shape 17"/>
           <p:cNvSpPr/>
           <p:nvPr/>
         </p:nvSpPr>
@@ -19835,7 +19967,7 @@
       </p:sp>
       <p:sp>
         <p:nvSpPr>
-          <p:cNvPr id="21" name="Text 19"/>
+          <p:cNvPr id="20" name="Text 18"/>
           <p:cNvSpPr/>
           <p:nvPr/>
         </p:nvSpPr>
@@ -19874,7 +20006,7 @@
       </p:sp>
       <p:sp>
         <p:nvSpPr>
-          <p:cNvPr id="22" name="Text 20"/>
+          <p:cNvPr id="21" name="Text 19"/>
           <p:cNvSpPr/>
           <p:nvPr/>
         </p:nvSpPr>
@@ -19913,7 +20045,7 @@
       </p:sp>
       <p:sp>
         <p:nvSpPr>
-          <p:cNvPr id="23" name="Shape 21"/>
+          <p:cNvPr id="22" name="Shape 20"/>
           <p:cNvSpPr/>
           <p:nvPr/>
         </p:nvSpPr>
@@ -19940,7 +20072,7 @@
       </p:sp>
       <p:sp>
         <p:nvSpPr>
-          <p:cNvPr id="24" name="Text 22"/>
+          <p:cNvPr id="23" name="Text 21"/>
           <p:cNvSpPr/>
           <p:nvPr/>
         </p:nvSpPr>
@@ -19979,7 +20111,7 @@
       </p:sp>
       <p:sp>
         <p:nvSpPr>
-          <p:cNvPr id="25" name="Shape 23"/>
+          <p:cNvPr id="24" name="Shape 22"/>
           <p:cNvSpPr/>
           <p:nvPr/>
         </p:nvSpPr>
@@ -20006,7 +20138,7 @@
       </p:sp>
       <p:sp>
         <p:nvSpPr>
-          <p:cNvPr id="26" name="Text 24"/>
+          <p:cNvPr id="25" name="Text 23"/>
           <p:cNvSpPr/>
           <p:nvPr/>
         </p:nvSpPr>
@@ -20045,7 +20177,7 @@
       </p:sp>
       <p:sp>
         <p:nvSpPr>
-          <p:cNvPr id="27" name="Shape 25"/>
+          <p:cNvPr id="26" name="Shape 24"/>
           <p:cNvSpPr/>
           <p:nvPr/>
         </p:nvSpPr>
@@ -20072,7 +20204,7 @@
       </p:sp>
       <p:sp>
         <p:nvSpPr>
-          <p:cNvPr id="28" name="Text 26"/>
+          <p:cNvPr id="27" name="Text 25"/>
           <p:cNvSpPr/>
           <p:nvPr/>
         </p:nvSpPr>
@@ -20111,7 +20243,7 @@
       </p:sp>
       <p:sp>
         <p:nvSpPr>
-          <p:cNvPr id="29" name="Shape 27"/>
+          <p:cNvPr id="28" name="Shape 26"/>
           <p:cNvSpPr/>
           <p:nvPr/>
         </p:nvSpPr>
@@ -20138,7 +20270,7 @@
       </p:sp>
       <p:sp>
         <p:nvSpPr>
-          <p:cNvPr id="30" name="Text 28"/>
+          <p:cNvPr id="29" name="Text 27"/>
           <p:cNvSpPr/>
           <p:nvPr/>
         </p:nvSpPr>
@@ -20461,7 +20593,7 @@
                 <a:ea typeface="Calibri" pitchFamily="34" charset="-122"/>
                 <a:cs typeface="Calibri" pitchFamily="34" charset="-120"/>
               </a:rPr>
-              <a:t>Word Labs  •  wordlabs.app  •  Root: 'rupt' = break, burst, force through</a:t>
+              <a:t>Word Labs  •  wordlabs.app  •  Root: 'rupt' = break, burst, or shatter</a:t>
             </a:r>
             <a:endParaRPr lang="en-US" sz="800" dirty="0"/>
           </a:p>
@@ -20600,7 +20732,7 @@
                 <a:ea typeface="Trebuchet MS" pitchFamily="34" charset="-122"/>
                 <a:cs typeface="Trebuchet MS" pitchFamily="34" charset="-120"/>
               </a:rPr>
-              <a:t>corrupt</a:t>
+              <a:t>erupt</a:t>
             </a:r>
             <a:endParaRPr lang="en-US" sz="2800" dirty="0"/>
           </a:p>
@@ -20739,7 +20871,7 @@
                 <a:ea typeface="Trebuchet MS" pitchFamily="34" charset="-122"/>
                 <a:cs typeface="Trebuchet MS" pitchFamily="34" charset="-120"/>
               </a:rPr>
-              <a:t>cor</a:t>
+              <a:t>e</a:t>
             </a:r>
             <a:endParaRPr lang="en-US" sz="1300" dirty="0"/>
           </a:p>
@@ -20778,7 +20910,7 @@
                 <a:ea typeface="Calibri" pitchFamily="34" charset="-122"/>
                 <a:cs typeface="Calibri" pitchFamily="34" charset="-120"/>
               </a:rPr>
-              <a:t>together, completely</a:t>
+              <a:t>out, from</a:t>
             </a:r>
             <a:endParaRPr lang="en-US" sz="850" dirty="0"/>
           </a:p>
@@ -20786,46 +20918,7 @@
       </p:sp>
       <p:sp>
         <p:nvSpPr>
-          <p:cNvPr id="19" name="Text 17"/>
-          <p:cNvSpPr/>
-          <p:nvPr/>
-        </p:nvSpPr>
-        <p:spPr>
-          <a:xfrm>
-            <a:off x="2938272" y="2752344"/>
-            <a:ext cx="1828800" cy="182880"/>
-          </a:xfrm>
-          <a:prstGeom prst="rect">
-            <a:avLst/>
-          </a:prstGeom>
-          <a:noFill/>
-          <a:ln/>
-        </p:spPr>
-        <p:txBody>
-          <a:bodyPr wrap="square" lIns="0" tIns="0" rIns="0" bIns="0" rtlCol="0" anchor="t"/>
-          <a:lstStyle/>
-          <a:p>
-            <a:pPr algn="ctr" indent="0" marL="0">
-              <a:buNone/>
-            </a:pPr>
-            <a:r>
-              <a:rPr lang="en-US" sz="700" i="1" dirty="0">
-                <a:solidFill>
-                  <a:srgbClr val="94A3B8"/>
-                </a:solidFill>
-                <a:latin typeface="Calibri" pitchFamily="34" charset="0"/>
-                <a:ea typeface="Calibri" pitchFamily="34" charset="-122"/>
-                <a:cs typeface="Calibri" pitchFamily="34" charset="-120"/>
-              </a:rPr>
-              <a:t>con → cor before 'r'</a:t>
-            </a:r>
-            <a:endParaRPr lang="en-US" sz="700" dirty="0"/>
-          </a:p>
-        </p:txBody>
-      </p:sp>
-      <p:sp>
-        <p:nvSpPr>
-          <p:cNvPr id="20" name="Shape 18"/>
+          <p:cNvPr id="19" name="Shape 17"/>
           <p:cNvSpPr/>
           <p:nvPr/>
         </p:nvSpPr>
@@ -20859,7 +20952,7 @@
       </p:sp>
       <p:sp>
         <p:nvSpPr>
-          <p:cNvPr id="21" name="Text 19"/>
+          <p:cNvPr id="20" name="Text 18"/>
           <p:cNvSpPr/>
           <p:nvPr/>
         </p:nvSpPr>
@@ -20898,7 +20991,7 @@
       </p:sp>
       <p:sp>
         <p:nvSpPr>
-          <p:cNvPr id="22" name="Text 20"/>
+          <p:cNvPr id="21" name="Text 19"/>
           <p:cNvSpPr/>
           <p:nvPr/>
         </p:nvSpPr>
@@ -20937,7 +21030,7 @@
       </p:sp>
       <p:sp>
         <p:nvSpPr>
-          <p:cNvPr id="23" name="Shape 21"/>
+          <p:cNvPr id="22" name="Shape 20"/>
           <p:cNvSpPr/>
           <p:nvPr/>
         </p:nvSpPr>
@@ -20964,7 +21057,7 @@
       </p:sp>
       <p:sp>
         <p:nvSpPr>
-          <p:cNvPr id="24" name="Text 22"/>
+          <p:cNvPr id="23" name="Text 21"/>
           <p:cNvSpPr/>
           <p:nvPr/>
         </p:nvSpPr>
@@ -21003,7 +21096,7 @@
       </p:sp>
       <p:sp>
         <p:nvSpPr>
-          <p:cNvPr id="25" name="Shape 23"/>
+          <p:cNvPr id="24" name="Shape 22"/>
           <p:cNvSpPr/>
           <p:nvPr/>
         </p:nvSpPr>
@@ -21030,7 +21123,7 @@
       </p:sp>
       <p:sp>
         <p:nvSpPr>
-          <p:cNvPr id="26" name="Shape 24"/>
+          <p:cNvPr id="25" name="Shape 23"/>
           <p:cNvSpPr/>
           <p:nvPr/>
         </p:nvSpPr>
@@ -21057,7 +21150,7 @@
       </p:sp>
       <p:sp>
         <p:nvSpPr>
-          <p:cNvPr id="27" name="Text 25"/>
+          <p:cNvPr id="26" name="Text 24"/>
           <p:cNvSpPr/>
           <p:nvPr/>
         </p:nvSpPr>
@@ -21088,7 +21181,7 @@
                 <a:ea typeface="Trebuchet MS" pitchFamily="34" charset="-122"/>
                 <a:cs typeface="Trebuchet MS" pitchFamily="34" charset="-120"/>
               </a:rPr>
-              <a:t>cor</a:t>
+              <a:t>e</a:t>
             </a:r>
             <a:endParaRPr lang="en-US" sz="1400" dirty="0"/>
           </a:p>
@@ -21096,7 +21189,7 @@
       </p:sp>
       <p:sp>
         <p:nvSpPr>
-          <p:cNvPr id="28" name="Text 26"/>
+          <p:cNvPr id="27" name="Text 25"/>
           <p:cNvSpPr/>
           <p:nvPr/>
         </p:nvSpPr>
@@ -21135,7 +21228,7 @@
       </p:sp>
       <p:sp>
         <p:nvSpPr>
-          <p:cNvPr id="29" name="Shape 27"/>
+          <p:cNvPr id="28" name="Shape 26"/>
           <p:cNvSpPr/>
           <p:nvPr/>
         </p:nvSpPr>
@@ -21162,7 +21255,7 @@
       </p:sp>
       <p:sp>
         <p:nvSpPr>
-          <p:cNvPr id="30" name="Text 28"/>
+          <p:cNvPr id="29" name="Text 27"/>
           <p:cNvSpPr/>
           <p:nvPr/>
         </p:nvSpPr>
@@ -21201,7 +21294,7 @@
       </p:sp>
       <p:sp>
         <p:nvSpPr>
-          <p:cNvPr id="31" name="Shape 29"/>
+          <p:cNvPr id="30" name="Shape 28"/>
           <p:cNvSpPr/>
           <p:nvPr/>
         </p:nvSpPr>
@@ -21228,7 +21321,7 @@
       </p:sp>
       <p:sp>
         <p:nvSpPr>
-          <p:cNvPr id="32" name="Text 30"/>
+          <p:cNvPr id="31" name="Text 29"/>
           <p:cNvSpPr/>
           <p:nvPr/>
         </p:nvSpPr>
@@ -21267,7 +21360,7 @@
       </p:sp>
       <p:sp>
         <p:nvSpPr>
-          <p:cNvPr id="33" name="Shape 31"/>
+          <p:cNvPr id="32" name="Shape 30"/>
           <p:cNvSpPr/>
           <p:nvPr/>
         </p:nvSpPr>
@@ -21294,7 +21387,7 @@
       </p:sp>
       <p:sp>
         <p:nvSpPr>
-          <p:cNvPr id="34" name="Text 32"/>
+          <p:cNvPr id="33" name="Text 31"/>
           <p:cNvSpPr/>
           <p:nvPr/>
         </p:nvSpPr>
@@ -21617,7 +21710,7 @@
                 <a:ea typeface="Calibri" pitchFamily="34" charset="-122"/>
                 <a:cs typeface="Calibri" pitchFamily="34" charset="-120"/>
               </a:rPr>
-              <a:t>Word Labs  •  wordlabs.app  •  Root: 'rupt' = break, burst, force through</a:t>
+              <a:t>Word Labs  •  wordlabs.app  •  Root: 'rupt' = break, burst, or shatter</a:t>
             </a:r>
             <a:endParaRPr lang="en-US" sz="800" dirty="0"/>
           </a:p>
@@ -21756,7 +21849,7 @@
                 <a:ea typeface="Trebuchet MS" pitchFamily="34" charset="-122"/>
                 <a:cs typeface="Trebuchet MS" pitchFamily="34" charset="-120"/>
               </a:rPr>
-              <a:t>corrupt</a:t>
+              <a:t>erupt</a:t>
             </a:r>
             <a:endParaRPr lang="en-US" sz="2800" dirty="0"/>
           </a:p>
@@ -21895,7 +21988,7 @@
                 <a:ea typeface="Trebuchet MS" pitchFamily="34" charset="-122"/>
                 <a:cs typeface="Trebuchet MS" pitchFamily="34" charset="-120"/>
               </a:rPr>
-              <a:t>cor</a:t>
+              <a:t>e</a:t>
             </a:r>
             <a:endParaRPr lang="en-US" sz="1300" dirty="0"/>
           </a:p>
@@ -21934,7 +22027,7 @@
                 <a:ea typeface="Calibri" pitchFamily="34" charset="-122"/>
                 <a:cs typeface="Calibri" pitchFamily="34" charset="-120"/>
               </a:rPr>
-              <a:t>together, completely</a:t>
+              <a:t>out, from</a:t>
             </a:r>
             <a:endParaRPr lang="en-US" sz="850" dirty="0"/>
           </a:p>
@@ -21942,46 +22035,7 @@
       </p:sp>
       <p:sp>
         <p:nvSpPr>
-          <p:cNvPr id="19" name="Text 17"/>
-          <p:cNvSpPr/>
-          <p:nvPr/>
-        </p:nvSpPr>
-        <p:spPr>
-          <a:xfrm>
-            <a:off x="2938272" y="2752344"/>
-            <a:ext cx="1828800" cy="182880"/>
-          </a:xfrm>
-          <a:prstGeom prst="rect">
-            <a:avLst/>
-          </a:prstGeom>
-          <a:noFill/>
-          <a:ln/>
-        </p:spPr>
-        <p:txBody>
-          <a:bodyPr wrap="square" lIns="0" tIns="0" rIns="0" bIns="0" rtlCol="0" anchor="t"/>
-          <a:lstStyle/>
-          <a:p>
-            <a:pPr algn="ctr" indent="0" marL="0">
-              <a:buNone/>
-            </a:pPr>
-            <a:r>
-              <a:rPr lang="en-US" sz="700" i="1" dirty="0">
-                <a:solidFill>
-                  <a:srgbClr val="94A3B8"/>
-                </a:solidFill>
-                <a:latin typeface="Calibri" pitchFamily="34" charset="0"/>
-                <a:ea typeface="Calibri" pitchFamily="34" charset="-122"/>
-                <a:cs typeface="Calibri" pitchFamily="34" charset="-120"/>
-              </a:rPr>
-              <a:t>con → cor before 'r'</a:t>
-            </a:r>
-            <a:endParaRPr lang="en-US" sz="700" dirty="0"/>
-          </a:p>
-        </p:txBody>
-      </p:sp>
-      <p:sp>
-        <p:nvSpPr>
-          <p:cNvPr id="20" name="Shape 18"/>
+          <p:cNvPr id="19" name="Shape 17"/>
           <p:cNvSpPr/>
           <p:nvPr/>
         </p:nvSpPr>
@@ -22015,7 +22069,7 @@
       </p:sp>
       <p:sp>
         <p:nvSpPr>
-          <p:cNvPr id="21" name="Text 19"/>
+          <p:cNvPr id="20" name="Text 18"/>
           <p:cNvSpPr/>
           <p:nvPr/>
         </p:nvSpPr>
@@ -22054,7 +22108,7 @@
       </p:sp>
       <p:sp>
         <p:nvSpPr>
-          <p:cNvPr id="22" name="Text 20"/>
+          <p:cNvPr id="21" name="Text 19"/>
           <p:cNvSpPr/>
           <p:nvPr/>
         </p:nvSpPr>
@@ -22093,7 +22147,7 @@
       </p:sp>
       <p:sp>
         <p:nvSpPr>
-          <p:cNvPr id="23" name="Shape 21"/>
+          <p:cNvPr id="22" name="Shape 20"/>
           <p:cNvSpPr/>
           <p:nvPr/>
         </p:nvSpPr>
@@ -22120,7 +22174,7 @@
       </p:sp>
       <p:sp>
         <p:nvSpPr>
-          <p:cNvPr id="24" name="Text 22"/>
+          <p:cNvPr id="23" name="Text 21"/>
           <p:cNvSpPr/>
           <p:nvPr/>
         </p:nvSpPr>
@@ -22159,7 +22213,7 @@
       </p:sp>
       <p:sp>
         <p:nvSpPr>
-          <p:cNvPr id="25" name="Shape 23"/>
+          <p:cNvPr id="24" name="Shape 22"/>
           <p:cNvSpPr/>
           <p:nvPr/>
         </p:nvSpPr>
@@ -22186,7 +22240,7 @@
       </p:sp>
       <p:sp>
         <p:nvSpPr>
-          <p:cNvPr id="26" name="Shape 24"/>
+          <p:cNvPr id="25" name="Shape 23"/>
           <p:cNvSpPr/>
           <p:nvPr/>
         </p:nvSpPr>
@@ -22213,7 +22267,7 @@
       </p:sp>
       <p:sp>
         <p:nvSpPr>
-          <p:cNvPr id="27" name="Text 25"/>
+          <p:cNvPr id="26" name="Text 24"/>
           <p:cNvSpPr/>
           <p:nvPr/>
         </p:nvSpPr>
@@ -22244,7 +22298,7 @@
                 <a:ea typeface="Trebuchet MS" pitchFamily="34" charset="-122"/>
                 <a:cs typeface="Trebuchet MS" pitchFamily="34" charset="-120"/>
               </a:rPr>
-              <a:t>cor</a:t>
+              <a:t>e</a:t>
             </a:r>
             <a:endParaRPr lang="en-US" sz="1400" dirty="0"/>
           </a:p>
@@ -22252,7 +22306,7 @@
       </p:sp>
       <p:sp>
         <p:nvSpPr>
-          <p:cNvPr id="28" name="Text 26"/>
+          <p:cNvPr id="27" name="Text 25"/>
           <p:cNvSpPr/>
           <p:nvPr/>
         </p:nvSpPr>
@@ -22291,7 +22345,7 @@
       </p:sp>
       <p:sp>
         <p:nvSpPr>
-          <p:cNvPr id="29" name="Shape 27"/>
+          <p:cNvPr id="28" name="Shape 26"/>
           <p:cNvSpPr/>
           <p:nvPr/>
         </p:nvSpPr>
@@ -22318,7 +22372,7 @@
       </p:sp>
       <p:sp>
         <p:nvSpPr>
-          <p:cNvPr id="30" name="Text 28"/>
+          <p:cNvPr id="29" name="Text 27"/>
           <p:cNvSpPr/>
           <p:nvPr/>
         </p:nvSpPr>
@@ -22357,7 +22411,7 @@
       </p:sp>
       <p:sp>
         <p:nvSpPr>
-          <p:cNvPr id="31" name="Shape 29"/>
+          <p:cNvPr id="30" name="Shape 28"/>
           <p:cNvSpPr/>
           <p:nvPr/>
         </p:nvSpPr>
@@ -22384,7 +22438,7 @@
       </p:sp>
       <p:sp>
         <p:nvSpPr>
-          <p:cNvPr id="32" name="Text 30"/>
+          <p:cNvPr id="31" name="Text 29"/>
           <p:cNvSpPr/>
           <p:nvPr/>
         </p:nvSpPr>
@@ -22423,22 +22477,49 @@
       </p:sp>
       <p:sp>
         <p:nvSpPr>
+          <p:cNvPr id="32" name="Shape 30"/>
+          <p:cNvSpPr/>
+          <p:nvPr/>
+        </p:nvSpPr>
+        <p:spPr>
+          <a:xfrm>
+            <a:off x="1874520" y="4096512"/>
+            <a:ext cx="6903720" cy="658368"/>
+          </a:xfrm>
+          <a:prstGeom prst="rect">
+            <a:avLst>
+              <a:gd name="adj" fmla="val 8333"/>
+            </a:avLst>
+          </a:prstGeom>
+          <a:solidFill>
+            <a:srgbClr val="FCE7F3"/>
+          </a:solidFill>
+          <a:ln w="12700">
+            <a:solidFill>
+              <a:srgbClr val="DB2777"/>
+            </a:solidFill>
+            <a:prstDash val="solid"/>
+          </a:ln>
+        </p:spPr>
+      </p:sp>
+      <p:sp>
+        <p:nvSpPr>
           <p:cNvPr id="33" name="Shape 31"/>
           <p:cNvSpPr/>
           <p:nvPr/>
         </p:nvSpPr>
         <p:spPr>
           <a:xfrm>
-            <a:off x="1874520" y="4096512"/>
-            <a:ext cx="6903720" cy="804672"/>
+            <a:off x="2427732" y="4169664"/>
+            <a:ext cx="685800" cy="475488"/>
           </a:xfrm>
           <a:prstGeom prst="rect">
             <a:avLst>
-              <a:gd name="adj" fmla="val 6818"/>
+              <a:gd name="adj" fmla="val 7692"/>
             </a:avLst>
           </a:prstGeom>
           <a:solidFill>
-            <a:srgbClr val="FCE7F3"/>
+            <a:srgbClr val="FFFFFF"/>
           </a:solidFill>
           <a:ln w="12700">
             <a:solidFill>
@@ -22450,41 +22531,14 @@
       </p:sp>
       <p:sp>
         <p:nvSpPr>
-          <p:cNvPr id="34" name="Shape 32"/>
-          <p:cNvSpPr/>
-          <p:nvPr/>
-        </p:nvSpPr>
-        <p:spPr>
-          <a:xfrm>
-            <a:off x="2254649" y="4169664"/>
-            <a:ext cx="685800" cy="384048"/>
-          </a:xfrm>
-          <a:prstGeom prst="rect">
-            <a:avLst>
-              <a:gd name="adj" fmla="val 9524"/>
-            </a:avLst>
-          </a:prstGeom>
-          <a:solidFill>
-            <a:srgbClr val="FFFFFF"/>
-          </a:solidFill>
-          <a:ln w="12700">
-            <a:solidFill>
-              <a:srgbClr val="DB2777"/>
-            </a:solidFill>
-            <a:prstDash val="solid"/>
-          </a:ln>
-        </p:spPr>
-      </p:sp>
-      <p:sp>
-        <p:nvSpPr>
-          <p:cNvPr id="35" name="Text 33"/>
-          <p:cNvSpPr/>
-          <p:nvPr/>
-        </p:nvSpPr>
-        <p:spPr>
-          <a:xfrm>
-            <a:off x="2254649" y="4169664"/>
-            <a:ext cx="685800" cy="384048"/>
+          <p:cNvPr id="34" name="Text 32"/>
+          <p:cNvSpPr/>
+          <p:nvPr/>
+        </p:nvSpPr>
+        <p:spPr>
+          <a:xfrm>
+            <a:off x="2427732" y="4169664"/>
+            <a:ext cx="685800" cy="475488"/>
           </a:xfrm>
           <a:prstGeom prst="rect">
             <a:avLst/>
@@ -22508,7 +22562,7 @@
                 <a:ea typeface="Trebuchet MS" pitchFamily="34" charset="-122"/>
                 <a:cs typeface="Trebuchet MS" pitchFamily="34" charset="-120"/>
               </a:rPr>
-              <a:t>c</a:t>
+              <a:t>e</a:t>
             </a:r>
             <a:endParaRPr lang="en-US" sz="900" dirty="0"/>
           </a:p>
@@ -22516,80 +22570,41 @@
       </p:sp>
       <p:sp>
         <p:nvSpPr>
+          <p:cNvPr id="35" name="Shape 33"/>
+          <p:cNvSpPr/>
+          <p:nvPr/>
+        </p:nvSpPr>
+        <p:spPr>
+          <a:xfrm>
+            <a:off x="3639312" y="4169664"/>
+            <a:ext cx="685800" cy="475488"/>
+          </a:xfrm>
+          <a:prstGeom prst="rect">
+            <a:avLst>
+              <a:gd name="adj" fmla="val 7692"/>
+            </a:avLst>
+          </a:prstGeom>
+          <a:solidFill>
+            <a:srgbClr val="FFFFFF"/>
+          </a:solidFill>
+          <a:ln w="12700">
+            <a:solidFill>
+              <a:srgbClr val="DB2777"/>
+            </a:solidFill>
+            <a:prstDash val="solid"/>
+          </a:ln>
+        </p:spPr>
+      </p:sp>
+      <p:sp>
+        <p:nvSpPr>
           <p:cNvPr id="36" name="Text 34"/>
           <p:cNvSpPr/>
           <p:nvPr/>
         </p:nvSpPr>
         <p:spPr>
           <a:xfrm>
-            <a:off x="2254649" y="4572000"/>
-            <a:ext cx="685800" cy="219456"/>
-          </a:xfrm>
-          <a:prstGeom prst="rect">
-            <a:avLst/>
-          </a:prstGeom>
-          <a:noFill/>
-          <a:ln/>
-        </p:spPr>
-        <p:txBody>
-          <a:bodyPr wrap="square" lIns="0" tIns="0" rIns="0" bIns="0" rtlCol="0" anchor="t"/>
-          <a:lstStyle/>
-          <a:p>
-            <a:pPr algn="ctr" indent="0" marL="0">
-              <a:buNone/>
-            </a:pPr>
-            <a:r>
-              <a:rPr lang="en-US" sz="750" i="1" dirty="0">
-                <a:solidFill>
-                  <a:srgbClr val="94A3B8"/>
-                </a:solidFill>
-                <a:latin typeface="Calibri" pitchFamily="34" charset="0"/>
-                <a:ea typeface="Calibri" pitchFamily="34" charset="-122"/>
-                <a:cs typeface="Calibri" pitchFamily="34" charset="-120"/>
-              </a:rPr>
-              <a:t>/k/</a:t>
-            </a:r>
-            <a:endParaRPr lang="en-US" sz="750" dirty="0"/>
-          </a:p>
-        </p:txBody>
-      </p:sp>
-      <p:sp>
-        <p:nvSpPr>
-          <p:cNvPr id="37" name="Shape 35"/>
-          <p:cNvSpPr/>
-          <p:nvPr/>
-        </p:nvSpPr>
-        <p:spPr>
-          <a:xfrm>
-            <a:off x="3293146" y="4169664"/>
-            <a:ext cx="685800" cy="384048"/>
-          </a:xfrm>
-          <a:prstGeom prst="rect">
-            <a:avLst>
-              <a:gd name="adj" fmla="val 9524"/>
-            </a:avLst>
-          </a:prstGeom>
-          <a:solidFill>
-            <a:srgbClr val="FFFFFF"/>
-          </a:solidFill>
-          <a:ln w="12700">
-            <a:solidFill>
-              <a:srgbClr val="DB2777"/>
-            </a:solidFill>
-            <a:prstDash val="solid"/>
-          </a:ln>
-        </p:spPr>
-      </p:sp>
-      <p:sp>
-        <p:nvSpPr>
-          <p:cNvPr id="38" name="Text 36"/>
-          <p:cNvSpPr/>
-          <p:nvPr/>
-        </p:nvSpPr>
-        <p:spPr>
-          <a:xfrm>
-            <a:off x="3293146" y="4169664"/>
-            <a:ext cx="685800" cy="384048"/>
+            <a:off x="3639312" y="4169664"/>
+            <a:ext cx="685800" cy="475488"/>
           </a:xfrm>
           <a:prstGeom prst="rect">
             <a:avLst/>
@@ -22613,7 +22628,7 @@
                 <a:ea typeface="Trebuchet MS" pitchFamily="34" charset="-122"/>
                 <a:cs typeface="Trebuchet MS" pitchFamily="34" charset="-120"/>
               </a:rPr>
-              <a:t>or</a:t>
+              <a:t>r</a:t>
             </a:r>
             <a:endParaRPr lang="en-US" sz="900" dirty="0"/>
           </a:p>
@@ -22621,18 +22636,18 @@
       </p:sp>
       <p:sp>
         <p:nvSpPr>
-          <p:cNvPr id="39" name="Shape 37"/>
-          <p:cNvSpPr/>
-          <p:nvPr/>
-        </p:nvSpPr>
-        <p:spPr>
-          <a:xfrm>
-            <a:off x="4331643" y="4169664"/>
-            <a:ext cx="685800" cy="384048"/>
+          <p:cNvPr id="37" name="Shape 35"/>
+          <p:cNvSpPr/>
+          <p:nvPr/>
+        </p:nvSpPr>
+        <p:spPr>
+          <a:xfrm>
+            <a:off x="4850892" y="4169664"/>
+            <a:ext cx="685800" cy="475488"/>
           </a:xfrm>
           <a:prstGeom prst="rect">
             <a:avLst>
-              <a:gd name="adj" fmla="val 9524"/>
+              <a:gd name="adj" fmla="val 7692"/>
             </a:avLst>
           </a:prstGeom>
           <a:solidFill>
@@ -22648,14 +22663,14 @@
       </p:sp>
       <p:sp>
         <p:nvSpPr>
-          <p:cNvPr id="40" name="Text 38"/>
-          <p:cNvSpPr/>
-          <p:nvPr/>
-        </p:nvSpPr>
-        <p:spPr>
-          <a:xfrm>
-            <a:off x="4331643" y="4169664"/>
-            <a:ext cx="685800" cy="384048"/>
+          <p:cNvPr id="38" name="Text 36"/>
+          <p:cNvSpPr/>
+          <p:nvPr/>
+        </p:nvSpPr>
+        <p:spPr>
+          <a:xfrm>
+            <a:off x="4850892" y="4169664"/>
+            <a:ext cx="685800" cy="475488"/>
           </a:xfrm>
           <a:prstGeom prst="rect">
             <a:avLst/>
@@ -22679,7 +22694,7 @@
                 <a:ea typeface="Trebuchet MS" pitchFamily="34" charset="-122"/>
                 <a:cs typeface="Trebuchet MS" pitchFamily="34" charset="-120"/>
               </a:rPr>
-              <a:t>r</a:t>
+              <a:t>u</a:t>
             </a:r>
             <a:endParaRPr lang="en-US" sz="900" dirty="0"/>
           </a:p>
@@ -22687,18 +22702,18 @@
       </p:sp>
       <p:sp>
         <p:nvSpPr>
-          <p:cNvPr id="41" name="Shape 39"/>
-          <p:cNvSpPr/>
-          <p:nvPr/>
-        </p:nvSpPr>
-        <p:spPr>
-          <a:xfrm>
-            <a:off x="5370141" y="4169664"/>
-            <a:ext cx="685800" cy="384048"/>
+          <p:cNvPr id="39" name="Shape 37"/>
+          <p:cNvSpPr/>
+          <p:nvPr/>
+        </p:nvSpPr>
+        <p:spPr>
+          <a:xfrm>
+            <a:off x="6062472" y="4169664"/>
+            <a:ext cx="685800" cy="475488"/>
           </a:xfrm>
           <a:prstGeom prst="rect">
             <a:avLst>
-              <a:gd name="adj" fmla="val 9524"/>
+              <a:gd name="adj" fmla="val 7692"/>
             </a:avLst>
           </a:prstGeom>
           <a:solidFill>
@@ -22714,14 +22729,14 @@
       </p:sp>
       <p:sp>
         <p:nvSpPr>
-          <p:cNvPr id="42" name="Text 40"/>
-          <p:cNvSpPr/>
-          <p:nvPr/>
-        </p:nvSpPr>
-        <p:spPr>
-          <a:xfrm>
-            <a:off x="5370141" y="4169664"/>
-            <a:ext cx="685800" cy="384048"/>
+          <p:cNvPr id="40" name="Text 38"/>
+          <p:cNvSpPr/>
+          <p:nvPr/>
+        </p:nvSpPr>
+        <p:spPr>
+          <a:xfrm>
+            <a:off x="6062472" y="4169664"/>
+            <a:ext cx="685800" cy="475488"/>
           </a:xfrm>
           <a:prstGeom prst="rect">
             <a:avLst/>
@@ -22745,7 +22760,7 @@
                 <a:ea typeface="Trebuchet MS" pitchFamily="34" charset="-122"/>
                 <a:cs typeface="Trebuchet MS" pitchFamily="34" charset="-120"/>
               </a:rPr>
-              <a:t>u</a:t>
+              <a:t>p</a:t>
             </a:r>
             <a:endParaRPr lang="en-US" sz="900" dirty="0"/>
           </a:p>
@@ -22753,18 +22768,18 @@
       </p:sp>
       <p:sp>
         <p:nvSpPr>
-          <p:cNvPr id="43" name="Shape 41"/>
-          <p:cNvSpPr/>
-          <p:nvPr/>
-        </p:nvSpPr>
-        <p:spPr>
-          <a:xfrm>
-            <a:off x="6408638" y="4169664"/>
-            <a:ext cx="685800" cy="384048"/>
+          <p:cNvPr id="41" name="Shape 39"/>
+          <p:cNvSpPr/>
+          <p:nvPr/>
+        </p:nvSpPr>
+        <p:spPr>
+          <a:xfrm>
+            <a:off x="7274052" y="4169664"/>
+            <a:ext cx="685800" cy="475488"/>
           </a:xfrm>
           <a:prstGeom prst="rect">
             <a:avLst>
-              <a:gd name="adj" fmla="val 9524"/>
+              <a:gd name="adj" fmla="val 7692"/>
             </a:avLst>
           </a:prstGeom>
           <a:solidFill>
@@ -22780,80 +22795,14 @@
       </p:sp>
       <p:sp>
         <p:nvSpPr>
-          <p:cNvPr id="44" name="Text 42"/>
-          <p:cNvSpPr/>
-          <p:nvPr/>
-        </p:nvSpPr>
-        <p:spPr>
-          <a:xfrm>
-            <a:off x="6408638" y="4169664"/>
-            <a:ext cx="685800" cy="384048"/>
-          </a:xfrm>
-          <a:prstGeom prst="rect">
-            <a:avLst/>
-          </a:prstGeom>
-          <a:noFill/>
-          <a:ln/>
-        </p:spPr>
-        <p:txBody>
-          <a:bodyPr wrap="square" lIns="0" tIns="0" rIns="0" bIns="0" rtlCol="0" anchor="ctr"/>
-          <a:lstStyle/>
-          <a:p>
-            <a:pPr algn="ctr" indent="0" marL="0">
-              <a:buNone/>
-            </a:pPr>
-            <a:r>
-              <a:rPr lang="en-US" sz="900" b="1" dirty="0">
-                <a:solidFill>
-                  <a:srgbClr val="9D174D"/>
-                </a:solidFill>
-                <a:latin typeface="Trebuchet MS" pitchFamily="34" charset="0"/>
-                <a:ea typeface="Trebuchet MS" pitchFamily="34" charset="-122"/>
-                <a:cs typeface="Trebuchet MS" pitchFamily="34" charset="-120"/>
-              </a:rPr>
-              <a:t>p</a:t>
-            </a:r>
-            <a:endParaRPr lang="en-US" sz="900" dirty="0"/>
-          </a:p>
-        </p:txBody>
-      </p:sp>
-      <p:sp>
-        <p:nvSpPr>
-          <p:cNvPr id="45" name="Shape 43"/>
-          <p:cNvSpPr/>
-          <p:nvPr/>
-        </p:nvSpPr>
-        <p:spPr>
-          <a:xfrm>
-            <a:off x="7447135" y="4169664"/>
-            <a:ext cx="685800" cy="384048"/>
-          </a:xfrm>
-          <a:prstGeom prst="rect">
-            <a:avLst>
-              <a:gd name="adj" fmla="val 9524"/>
-            </a:avLst>
-          </a:prstGeom>
-          <a:solidFill>
-            <a:srgbClr val="FFFFFF"/>
-          </a:solidFill>
-          <a:ln w="12700">
-            <a:solidFill>
-              <a:srgbClr val="DB2777"/>
-            </a:solidFill>
-            <a:prstDash val="solid"/>
-          </a:ln>
-        </p:spPr>
-      </p:sp>
-      <p:sp>
-        <p:nvSpPr>
-          <p:cNvPr id="46" name="Text 44"/>
-          <p:cNvSpPr/>
-          <p:nvPr/>
-        </p:nvSpPr>
-        <p:spPr>
-          <a:xfrm>
-            <a:off x="7447135" y="4169664"/>
-            <a:ext cx="685800" cy="384048"/>
+          <p:cNvPr id="42" name="Text 40"/>
+          <p:cNvSpPr/>
+          <p:nvPr/>
+        </p:nvSpPr>
+        <p:spPr>
+          <a:xfrm>
+            <a:off x="7274052" y="4169664"/>
+            <a:ext cx="685800" cy="475488"/>
           </a:xfrm>
           <a:prstGeom prst="rect">
             <a:avLst/>
@@ -23169,7 +23118,7 @@
                 <a:ea typeface="Calibri" pitchFamily="34" charset="-122"/>
                 <a:cs typeface="Calibri" pitchFamily="34" charset="-120"/>
               </a:rPr>
-              <a:t>Word Labs  •  wordlabs.app  •  Root: 'rupt' = break, burst, force through</a:t>
+              <a:t>Word Labs  •  wordlabs.app  •  Root: 'rupt' = break, burst, or shatter</a:t>
             </a:r>
             <a:endParaRPr lang="en-US" sz="800" dirty="0"/>
           </a:p>
@@ -23308,7 +23257,7 @@
                 <a:ea typeface="Trebuchet MS" pitchFamily="34" charset="-122"/>
                 <a:cs typeface="Trebuchet MS" pitchFamily="34" charset="-120"/>
               </a:rPr>
-              <a:t>disrupt</a:t>
+              <a:t>corrupt</a:t>
             </a:r>
             <a:endParaRPr lang="en-US" sz="2800" dirty="0"/>
           </a:p>
@@ -23996,7 +23945,7 @@
                 <a:ea typeface="Calibri" pitchFamily="34" charset="-122"/>
                 <a:cs typeface="Calibri" pitchFamily="34" charset="-120"/>
               </a:rPr>
-              <a:t>Word Labs  •  wordlabs.app  •  Root: 'rupt' = break, burst, force through</a:t>
+              <a:t>Word Labs  •  wordlabs.app  •  Root: 'rupt' = break, burst, or shatter</a:t>
             </a:r>
             <a:endParaRPr lang="en-US" sz="800" dirty="0"/>
           </a:p>
@@ -24135,7 +24084,7 @@
                 <a:ea typeface="Trebuchet MS" pitchFamily="34" charset="-122"/>
                 <a:cs typeface="Trebuchet MS" pitchFamily="34" charset="-120"/>
               </a:rPr>
-              <a:t>disrupt</a:t>
+              <a:t>corrupt</a:t>
             </a:r>
             <a:endParaRPr lang="en-US" sz="2800" dirty="0"/>
           </a:p>
@@ -24274,7 +24223,7 @@
                 <a:ea typeface="Trebuchet MS" pitchFamily="34" charset="-122"/>
                 <a:cs typeface="Trebuchet MS" pitchFamily="34" charset="-120"/>
               </a:rPr>
-              <a:t>dis</a:t>
+              <a:t>cor</a:t>
             </a:r>
             <a:endParaRPr lang="en-US" sz="1300" dirty="0"/>
           </a:p>
@@ -24313,7 +24262,7 @@
                 <a:ea typeface="Calibri" pitchFamily="34" charset="-122"/>
                 <a:cs typeface="Calibri" pitchFamily="34" charset="-120"/>
               </a:rPr>
-              <a:t>apart, away</a:t>
+              <a:t>together, completely</a:t>
             </a:r>
             <a:endParaRPr lang="en-US" sz="850" dirty="0"/>
           </a:p>
@@ -24321,7 +24270,46 @@
       </p:sp>
       <p:sp>
         <p:nvSpPr>
-          <p:cNvPr id="19" name="Shape 17"/>
+          <p:cNvPr id="19" name="Text 17"/>
+          <p:cNvSpPr/>
+          <p:nvPr/>
+        </p:nvSpPr>
+        <p:spPr>
+          <a:xfrm>
+            <a:off x="2938272" y="2752344"/>
+            <a:ext cx="1828800" cy="182880"/>
+          </a:xfrm>
+          <a:prstGeom prst="rect">
+            <a:avLst/>
+          </a:prstGeom>
+          <a:noFill/>
+          <a:ln/>
+        </p:spPr>
+        <p:txBody>
+          <a:bodyPr wrap="square" lIns="0" tIns="0" rIns="0" bIns="0" rtlCol="0" anchor="t"/>
+          <a:lstStyle/>
+          <a:p>
+            <a:pPr algn="ctr" indent="0" marL="0">
+              <a:buNone/>
+            </a:pPr>
+            <a:r>
+              <a:rPr lang="en-US" sz="700" i="1" dirty="0">
+                <a:solidFill>
+                  <a:srgbClr val="94A3B8"/>
+                </a:solidFill>
+                <a:latin typeface="Calibri" pitchFamily="34" charset="0"/>
+                <a:ea typeface="Calibri" pitchFamily="34" charset="-122"/>
+                <a:cs typeface="Calibri" pitchFamily="34" charset="-120"/>
+              </a:rPr>
+              <a:t>con → cor before 'r'</a:t>
+            </a:r>
+            <a:endParaRPr lang="en-US" sz="700" dirty="0"/>
+          </a:p>
+        </p:txBody>
+      </p:sp>
+      <p:sp>
+        <p:nvSpPr>
+          <p:cNvPr id="20" name="Shape 18"/>
           <p:cNvSpPr/>
           <p:nvPr/>
         </p:nvSpPr>
@@ -24355,7 +24343,7 @@
       </p:sp>
       <p:sp>
         <p:nvSpPr>
-          <p:cNvPr id="20" name="Text 18"/>
+          <p:cNvPr id="21" name="Text 19"/>
           <p:cNvSpPr/>
           <p:nvPr/>
         </p:nvSpPr>
@@ -24394,7 +24382,7 @@
       </p:sp>
       <p:sp>
         <p:nvSpPr>
-          <p:cNvPr id="21" name="Text 19"/>
+          <p:cNvPr id="22" name="Text 20"/>
           <p:cNvSpPr/>
           <p:nvPr/>
         </p:nvSpPr>
@@ -24433,7 +24421,7 @@
       </p:sp>
       <p:sp>
         <p:nvSpPr>
-          <p:cNvPr id="22" name="Shape 20"/>
+          <p:cNvPr id="23" name="Shape 21"/>
           <p:cNvSpPr/>
           <p:nvPr/>
         </p:nvSpPr>
@@ -24460,7 +24448,7 @@
       </p:sp>
       <p:sp>
         <p:nvSpPr>
-          <p:cNvPr id="23" name="Text 21"/>
+          <p:cNvPr id="24" name="Text 22"/>
           <p:cNvSpPr/>
           <p:nvPr/>
         </p:nvSpPr>
@@ -24499,7 +24487,7 @@
       </p:sp>
       <p:sp>
         <p:nvSpPr>
-          <p:cNvPr id="24" name="Shape 22"/>
+          <p:cNvPr id="25" name="Shape 23"/>
           <p:cNvSpPr/>
           <p:nvPr/>
         </p:nvSpPr>
@@ -24526,7 +24514,7 @@
       </p:sp>
       <p:sp>
         <p:nvSpPr>
-          <p:cNvPr id="25" name="Text 23"/>
+          <p:cNvPr id="26" name="Text 24"/>
           <p:cNvSpPr/>
           <p:nvPr/>
         </p:nvSpPr>
@@ -24565,7 +24553,7 @@
       </p:sp>
       <p:sp>
         <p:nvSpPr>
-          <p:cNvPr id="26" name="Shape 24"/>
+          <p:cNvPr id="27" name="Shape 25"/>
           <p:cNvSpPr/>
           <p:nvPr/>
         </p:nvSpPr>
@@ -24592,7 +24580,7 @@
       </p:sp>
       <p:sp>
         <p:nvSpPr>
-          <p:cNvPr id="27" name="Text 25"/>
+          <p:cNvPr id="28" name="Text 26"/>
           <p:cNvSpPr/>
           <p:nvPr/>
         </p:nvSpPr>
@@ -24631,7 +24619,7 @@
       </p:sp>
       <p:sp>
         <p:nvSpPr>
-          <p:cNvPr id="28" name="Shape 26"/>
+          <p:cNvPr id="29" name="Shape 27"/>
           <p:cNvSpPr/>
           <p:nvPr/>
         </p:nvSpPr>
@@ -24658,7 +24646,7 @@
       </p:sp>
       <p:sp>
         <p:nvSpPr>
-          <p:cNvPr id="29" name="Text 27"/>
+          <p:cNvPr id="30" name="Text 28"/>
           <p:cNvSpPr/>
           <p:nvPr/>
         </p:nvSpPr>
@@ -24981,7 +24969,7 @@
                 <a:ea typeface="Calibri" pitchFamily="34" charset="-122"/>
                 <a:cs typeface="Calibri" pitchFamily="34" charset="-120"/>
               </a:rPr>
-              <a:t>Word Labs  •  wordlabs.app  •  Root: 'rupt' = break, burst, force through</a:t>
+              <a:t>Word Labs  •  wordlabs.app  •  Root: 'rupt' = break, burst, or shatter</a:t>
             </a:r>
             <a:endParaRPr lang="en-US" sz="800" dirty="0"/>
           </a:p>
@@ -25054,7 +25042,7 @@
                 <a:ea typeface="Trebuchet MS" pitchFamily="34" charset="-122"/>
                 <a:cs typeface="Trebuchet MS" pitchFamily="34" charset="-120"/>
               </a:rPr>
-              <a:t>We are learning that the root 'rupt' means 'break, burst, force through'.</a:t>
+              <a:t>We are learning that the root 'rupt' means 'break, burst, or shatter'.</a:t>
             </a:r>
             <a:endParaRPr lang="en-US" sz="2000" dirty="0"/>
           </a:p>
@@ -25700,7 +25688,7 @@
                 <a:ea typeface="Calibri" pitchFamily="34" charset="-122"/>
                 <a:cs typeface="Calibri" pitchFamily="34" charset="-120"/>
               </a:rPr>
-              <a:t>Word Labs  •  wordlabs.app  •  Root: 'rupt' = break, burst, force through</a:t>
+              <a:t>Word Labs  •  wordlabs.app  •  Root: 'rupt' = break, burst, or shatter</a:t>
             </a:r>
             <a:endParaRPr lang="en-US" sz="800" dirty="0"/>
           </a:p>
@@ -25839,7 +25827,7 @@
                 <a:ea typeface="Trebuchet MS" pitchFamily="34" charset="-122"/>
                 <a:cs typeface="Trebuchet MS" pitchFamily="34" charset="-120"/>
               </a:rPr>
-              <a:t>disrupt</a:t>
+              <a:t>corrupt</a:t>
             </a:r>
             <a:endParaRPr lang="en-US" sz="2800" dirty="0"/>
           </a:p>
@@ -25978,7 +25966,7 @@
                 <a:ea typeface="Trebuchet MS" pitchFamily="34" charset="-122"/>
                 <a:cs typeface="Trebuchet MS" pitchFamily="34" charset="-120"/>
               </a:rPr>
-              <a:t>dis</a:t>
+              <a:t>cor</a:t>
             </a:r>
             <a:endParaRPr lang="en-US" sz="1300" dirty="0"/>
           </a:p>
@@ -26017,7 +26005,7 @@
                 <a:ea typeface="Calibri" pitchFamily="34" charset="-122"/>
                 <a:cs typeface="Calibri" pitchFamily="34" charset="-120"/>
               </a:rPr>
-              <a:t>apart, away</a:t>
+              <a:t>together, completely</a:t>
             </a:r>
             <a:endParaRPr lang="en-US" sz="850" dirty="0"/>
           </a:p>
@@ -26025,7 +26013,46 @@
       </p:sp>
       <p:sp>
         <p:nvSpPr>
-          <p:cNvPr id="19" name="Shape 17"/>
+          <p:cNvPr id="19" name="Text 17"/>
+          <p:cNvSpPr/>
+          <p:nvPr/>
+        </p:nvSpPr>
+        <p:spPr>
+          <a:xfrm>
+            <a:off x="2938272" y="2752344"/>
+            <a:ext cx="1828800" cy="182880"/>
+          </a:xfrm>
+          <a:prstGeom prst="rect">
+            <a:avLst/>
+          </a:prstGeom>
+          <a:noFill/>
+          <a:ln/>
+        </p:spPr>
+        <p:txBody>
+          <a:bodyPr wrap="square" lIns="0" tIns="0" rIns="0" bIns="0" rtlCol="0" anchor="t"/>
+          <a:lstStyle/>
+          <a:p>
+            <a:pPr algn="ctr" indent="0" marL="0">
+              <a:buNone/>
+            </a:pPr>
+            <a:r>
+              <a:rPr lang="en-US" sz="700" i="1" dirty="0">
+                <a:solidFill>
+                  <a:srgbClr val="94A3B8"/>
+                </a:solidFill>
+                <a:latin typeface="Calibri" pitchFamily="34" charset="0"/>
+                <a:ea typeface="Calibri" pitchFamily="34" charset="-122"/>
+                <a:cs typeface="Calibri" pitchFamily="34" charset="-120"/>
+              </a:rPr>
+              <a:t>con → cor before 'r'</a:t>
+            </a:r>
+            <a:endParaRPr lang="en-US" sz="700" dirty="0"/>
+          </a:p>
+        </p:txBody>
+      </p:sp>
+      <p:sp>
+        <p:nvSpPr>
+          <p:cNvPr id="20" name="Shape 18"/>
           <p:cNvSpPr/>
           <p:nvPr/>
         </p:nvSpPr>
@@ -26059,7 +26086,7 @@
       </p:sp>
       <p:sp>
         <p:nvSpPr>
-          <p:cNvPr id="20" name="Text 18"/>
+          <p:cNvPr id="21" name="Text 19"/>
           <p:cNvSpPr/>
           <p:nvPr/>
         </p:nvSpPr>
@@ -26098,7 +26125,7 @@
       </p:sp>
       <p:sp>
         <p:nvSpPr>
-          <p:cNvPr id="21" name="Text 19"/>
+          <p:cNvPr id="22" name="Text 20"/>
           <p:cNvSpPr/>
           <p:nvPr/>
         </p:nvSpPr>
@@ -26137,7 +26164,7 @@
       </p:sp>
       <p:sp>
         <p:nvSpPr>
-          <p:cNvPr id="22" name="Shape 20"/>
+          <p:cNvPr id="23" name="Shape 21"/>
           <p:cNvSpPr/>
           <p:nvPr/>
         </p:nvSpPr>
@@ -26164,7 +26191,7 @@
       </p:sp>
       <p:sp>
         <p:nvSpPr>
-          <p:cNvPr id="23" name="Text 21"/>
+          <p:cNvPr id="24" name="Text 22"/>
           <p:cNvSpPr/>
           <p:nvPr/>
         </p:nvSpPr>
@@ -26203,7 +26230,7 @@
       </p:sp>
       <p:sp>
         <p:nvSpPr>
-          <p:cNvPr id="24" name="Shape 22"/>
+          <p:cNvPr id="25" name="Shape 23"/>
           <p:cNvSpPr/>
           <p:nvPr/>
         </p:nvSpPr>
@@ -26230,7 +26257,7 @@
       </p:sp>
       <p:sp>
         <p:nvSpPr>
-          <p:cNvPr id="25" name="Shape 23"/>
+          <p:cNvPr id="26" name="Shape 24"/>
           <p:cNvSpPr/>
           <p:nvPr/>
         </p:nvSpPr>
@@ -26257,7 +26284,7 @@
       </p:sp>
       <p:sp>
         <p:nvSpPr>
-          <p:cNvPr id="26" name="Text 24"/>
+          <p:cNvPr id="27" name="Text 25"/>
           <p:cNvSpPr/>
           <p:nvPr/>
         </p:nvSpPr>
@@ -26288,7 +26315,7 @@
                 <a:ea typeface="Trebuchet MS" pitchFamily="34" charset="-122"/>
                 <a:cs typeface="Trebuchet MS" pitchFamily="34" charset="-120"/>
               </a:rPr>
-              <a:t>dis</a:t>
+              <a:t>cor</a:t>
             </a:r>
             <a:endParaRPr lang="en-US" sz="1400" dirty="0"/>
           </a:p>
@@ -26296,7 +26323,7 @@
       </p:sp>
       <p:sp>
         <p:nvSpPr>
-          <p:cNvPr id="27" name="Text 25"/>
+          <p:cNvPr id="28" name="Text 26"/>
           <p:cNvSpPr/>
           <p:nvPr/>
         </p:nvSpPr>
@@ -26335,7 +26362,7 @@
       </p:sp>
       <p:sp>
         <p:nvSpPr>
-          <p:cNvPr id="28" name="Shape 26"/>
+          <p:cNvPr id="29" name="Shape 27"/>
           <p:cNvSpPr/>
           <p:nvPr/>
         </p:nvSpPr>
@@ -26362,7 +26389,7 @@
       </p:sp>
       <p:sp>
         <p:nvSpPr>
-          <p:cNvPr id="29" name="Text 27"/>
+          <p:cNvPr id="30" name="Text 28"/>
           <p:cNvSpPr/>
           <p:nvPr/>
         </p:nvSpPr>
@@ -26401,7 +26428,7 @@
       </p:sp>
       <p:sp>
         <p:nvSpPr>
-          <p:cNvPr id="30" name="Shape 28"/>
+          <p:cNvPr id="31" name="Shape 29"/>
           <p:cNvSpPr/>
           <p:nvPr/>
         </p:nvSpPr>
@@ -26428,7 +26455,7 @@
       </p:sp>
       <p:sp>
         <p:nvSpPr>
-          <p:cNvPr id="31" name="Text 29"/>
+          <p:cNvPr id="32" name="Text 30"/>
           <p:cNvSpPr/>
           <p:nvPr/>
         </p:nvSpPr>
@@ -26467,7 +26494,7 @@
       </p:sp>
       <p:sp>
         <p:nvSpPr>
-          <p:cNvPr id="32" name="Shape 30"/>
+          <p:cNvPr id="33" name="Shape 31"/>
           <p:cNvSpPr/>
           <p:nvPr/>
         </p:nvSpPr>
@@ -26494,7 +26521,7 @@
       </p:sp>
       <p:sp>
         <p:nvSpPr>
-          <p:cNvPr id="33" name="Text 31"/>
+          <p:cNvPr id="34" name="Text 32"/>
           <p:cNvSpPr/>
           <p:nvPr/>
         </p:nvSpPr>
@@ -26817,7 +26844,7 @@
                 <a:ea typeface="Calibri" pitchFamily="34" charset="-122"/>
                 <a:cs typeface="Calibri" pitchFamily="34" charset="-120"/>
               </a:rPr>
-              <a:t>Word Labs  •  wordlabs.app  •  Root: 'rupt' = break, burst, force through</a:t>
+              <a:t>Word Labs  •  wordlabs.app  •  Root: 'rupt' = break, burst, or shatter</a:t>
             </a:r>
             <a:endParaRPr lang="en-US" sz="800" dirty="0"/>
           </a:p>
@@ -26956,7 +26983,7 @@
                 <a:ea typeface="Trebuchet MS" pitchFamily="34" charset="-122"/>
                 <a:cs typeface="Trebuchet MS" pitchFamily="34" charset="-120"/>
               </a:rPr>
-              <a:t>disrupt</a:t>
+              <a:t>corrupt</a:t>
             </a:r>
             <a:endParaRPr lang="en-US" sz="2800" dirty="0"/>
           </a:p>
@@ -27095,7 +27122,7 @@
                 <a:ea typeface="Trebuchet MS" pitchFamily="34" charset="-122"/>
                 <a:cs typeface="Trebuchet MS" pitchFamily="34" charset="-120"/>
               </a:rPr>
-              <a:t>dis</a:t>
+              <a:t>cor</a:t>
             </a:r>
             <a:endParaRPr lang="en-US" sz="1300" dirty="0"/>
           </a:p>
@@ -27134,7 +27161,7 @@
                 <a:ea typeface="Calibri" pitchFamily="34" charset="-122"/>
                 <a:cs typeface="Calibri" pitchFamily="34" charset="-120"/>
               </a:rPr>
-              <a:t>apart, away</a:t>
+              <a:t>together, completely</a:t>
             </a:r>
             <a:endParaRPr lang="en-US" sz="850" dirty="0"/>
           </a:p>
@@ -27142,7 +27169,46 @@
       </p:sp>
       <p:sp>
         <p:nvSpPr>
-          <p:cNvPr id="19" name="Shape 17"/>
+          <p:cNvPr id="19" name="Text 17"/>
+          <p:cNvSpPr/>
+          <p:nvPr/>
+        </p:nvSpPr>
+        <p:spPr>
+          <a:xfrm>
+            <a:off x="2938272" y="2752344"/>
+            <a:ext cx="1828800" cy="182880"/>
+          </a:xfrm>
+          <a:prstGeom prst="rect">
+            <a:avLst/>
+          </a:prstGeom>
+          <a:noFill/>
+          <a:ln/>
+        </p:spPr>
+        <p:txBody>
+          <a:bodyPr wrap="square" lIns="0" tIns="0" rIns="0" bIns="0" rtlCol="0" anchor="t"/>
+          <a:lstStyle/>
+          <a:p>
+            <a:pPr algn="ctr" indent="0" marL="0">
+              <a:buNone/>
+            </a:pPr>
+            <a:r>
+              <a:rPr lang="en-US" sz="700" i="1" dirty="0">
+                <a:solidFill>
+                  <a:srgbClr val="94A3B8"/>
+                </a:solidFill>
+                <a:latin typeface="Calibri" pitchFamily="34" charset="0"/>
+                <a:ea typeface="Calibri" pitchFamily="34" charset="-122"/>
+                <a:cs typeface="Calibri" pitchFamily="34" charset="-120"/>
+              </a:rPr>
+              <a:t>con → cor before 'r'</a:t>
+            </a:r>
+            <a:endParaRPr lang="en-US" sz="700" dirty="0"/>
+          </a:p>
+        </p:txBody>
+      </p:sp>
+      <p:sp>
+        <p:nvSpPr>
+          <p:cNvPr id="20" name="Shape 18"/>
           <p:cNvSpPr/>
           <p:nvPr/>
         </p:nvSpPr>
@@ -27176,7 +27242,7 @@
       </p:sp>
       <p:sp>
         <p:nvSpPr>
-          <p:cNvPr id="20" name="Text 18"/>
+          <p:cNvPr id="21" name="Text 19"/>
           <p:cNvSpPr/>
           <p:nvPr/>
         </p:nvSpPr>
@@ -27215,7 +27281,7 @@
       </p:sp>
       <p:sp>
         <p:nvSpPr>
-          <p:cNvPr id="21" name="Text 19"/>
+          <p:cNvPr id="22" name="Text 20"/>
           <p:cNvSpPr/>
           <p:nvPr/>
         </p:nvSpPr>
@@ -27254,7 +27320,7 @@
       </p:sp>
       <p:sp>
         <p:nvSpPr>
-          <p:cNvPr id="22" name="Shape 20"/>
+          <p:cNvPr id="23" name="Shape 21"/>
           <p:cNvSpPr/>
           <p:nvPr/>
         </p:nvSpPr>
@@ -27281,7 +27347,7 @@
       </p:sp>
       <p:sp>
         <p:nvSpPr>
-          <p:cNvPr id="23" name="Text 21"/>
+          <p:cNvPr id="24" name="Text 22"/>
           <p:cNvSpPr/>
           <p:nvPr/>
         </p:nvSpPr>
@@ -27320,7 +27386,7 @@
       </p:sp>
       <p:sp>
         <p:nvSpPr>
-          <p:cNvPr id="24" name="Shape 22"/>
+          <p:cNvPr id="25" name="Shape 23"/>
           <p:cNvSpPr/>
           <p:nvPr/>
         </p:nvSpPr>
@@ -27347,7 +27413,7 @@
       </p:sp>
       <p:sp>
         <p:nvSpPr>
-          <p:cNvPr id="25" name="Shape 23"/>
+          <p:cNvPr id="26" name="Shape 24"/>
           <p:cNvSpPr/>
           <p:nvPr/>
         </p:nvSpPr>
@@ -27374,7 +27440,7 @@
       </p:sp>
       <p:sp>
         <p:nvSpPr>
-          <p:cNvPr id="26" name="Text 24"/>
+          <p:cNvPr id="27" name="Text 25"/>
           <p:cNvSpPr/>
           <p:nvPr/>
         </p:nvSpPr>
@@ -27405,7 +27471,7 @@
                 <a:ea typeface="Trebuchet MS" pitchFamily="34" charset="-122"/>
                 <a:cs typeface="Trebuchet MS" pitchFamily="34" charset="-120"/>
               </a:rPr>
-              <a:t>dis</a:t>
+              <a:t>cor</a:t>
             </a:r>
             <a:endParaRPr lang="en-US" sz="1400" dirty="0"/>
           </a:p>
@@ -27413,7 +27479,7 @@
       </p:sp>
       <p:sp>
         <p:nvSpPr>
-          <p:cNvPr id="27" name="Text 25"/>
+          <p:cNvPr id="28" name="Text 26"/>
           <p:cNvSpPr/>
           <p:nvPr/>
         </p:nvSpPr>
@@ -27452,7 +27518,7 @@
       </p:sp>
       <p:sp>
         <p:nvSpPr>
-          <p:cNvPr id="28" name="Shape 26"/>
+          <p:cNvPr id="29" name="Shape 27"/>
           <p:cNvSpPr/>
           <p:nvPr/>
         </p:nvSpPr>
@@ -27479,7 +27545,7 @@
       </p:sp>
       <p:sp>
         <p:nvSpPr>
-          <p:cNvPr id="29" name="Text 27"/>
+          <p:cNvPr id="30" name="Text 28"/>
           <p:cNvSpPr/>
           <p:nvPr/>
         </p:nvSpPr>
@@ -27518,7 +27584,7 @@
       </p:sp>
       <p:sp>
         <p:nvSpPr>
-          <p:cNvPr id="30" name="Shape 28"/>
+          <p:cNvPr id="31" name="Shape 29"/>
           <p:cNvSpPr/>
           <p:nvPr/>
         </p:nvSpPr>
@@ -27545,7 +27611,7 @@
       </p:sp>
       <p:sp>
         <p:nvSpPr>
-          <p:cNvPr id="31" name="Text 29"/>
+          <p:cNvPr id="32" name="Text 30"/>
           <p:cNvSpPr/>
           <p:nvPr/>
         </p:nvSpPr>
@@ -27584,18 +27650,18 @@
       </p:sp>
       <p:sp>
         <p:nvSpPr>
-          <p:cNvPr id="32" name="Shape 30"/>
+          <p:cNvPr id="33" name="Shape 31"/>
           <p:cNvSpPr/>
           <p:nvPr/>
         </p:nvSpPr>
         <p:spPr>
           <a:xfrm>
             <a:off x="1874520" y="4096512"/>
-            <a:ext cx="6903720" cy="658368"/>
+            <a:ext cx="6903720" cy="804672"/>
           </a:xfrm>
           <a:prstGeom prst="rect">
             <a:avLst>
-              <a:gd name="adj" fmla="val 8333"/>
+              <a:gd name="adj" fmla="val 6818"/>
             </a:avLst>
           </a:prstGeom>
           <a:solidFill>
@@ -27611,18 +27677,18 @@
       </p:sp>
       <p:sp>
         <p:nvSpPr>
-          <p:cNvPr id="33" name="Shape 31"/>
-          <p:cNvSpPr/>
-          <p:nvPr/>
-        </p:nvSpPr>
-        <p:spPr>
-          <a:xfrm>
-            <a:off x="2124837" y="4169664"/>
-            <a:ext cx="685800" cy="475488"/>
+          <p:cNvPr id="34" name="Shape 32"/>
+          <p:cNvSpPr/>
+          <p:nvPr/>
+        </p:nvSpPr>
+        <p:spPr>
+          <a:xfrm>
+            <a:off x="2254649" y="4169664"/>
+            <a:ext cx="685800" cy="384048"/>
           </a:xfrm>
           <a:prstGeom prst="rect">
             <a:avLst>
-              <a:gd name="adj" fmla="val 7692"/>
+              <a:gd name="adj" fmla="val 9524"/>
             </a:avLst>
           </a:prstGeom>
           <a:solidFill>
@@ -27638,14 +27704,14 @@
       </p:sp>
       <p:sp>
         <p:nvSpPr>
-          <p:cNvPr id="34" name="Text 32"/>
-          <p:cNvSpPr/>
-          <p:nvPr/>
-        </p:nvSpPr>
-        <p:spPr>
-          <a:xfrm>
-            <a:off x="2124837" y="4169664"/>
-            <a:ext cx="685800" cy="475488"/>
+          <p:cNvPr id="35" name="Text 33"/>
+          <p:cNvSpPr/>
+          <p:nvPr/>
+        </p:nvSpPr>
+        <p:spPr>
+          <a:xfrm>
+            <a:off x="2254649" y="4169664"/>
+            <a:ext cx="685800" cy="384048"/>
           </a:xfrm>
           <a:prstGeom prst="rect">
             <a:avLst/>
@@ -27669,7 +27735,7 @@
                 <a:ea typeface="Trebuchet MS" pitchFamily="34" charset="-122"/>
                 <a:cs typeface="Trebuchet MS" pitchFamily="34" charset="-120"/>
               </a:rPr>
-              <a:t>d</a:t>
+              <a:t>c</a:t>
             </a:r>
             <a:endParaRPr lang="en-US" sz="900" dirty="0"/>
           </a:p>
@@ -27677,18 +27743,57 @@
       </p:sp>
       <p:sp>
         <p:nvSpPr>
-          <p:cNvPr id="35" name="Shape 33"/>
-          <p:cNvSpPr/>
-          <p:nvPr/>
-        </p:nvSpPr>
-        <p:spPr>
-          <a:xfrm>
-            <a:off x="3033522" y="4169664"/>
-            <a:ext cx="685800" cy="475488"/>
+          <p:cNvPr id="36" name="Text 34"/>
+          <p:cNvSpPr/>
+          <p:nvPr/>
+        </p:nvSpPr>
+        <p:spPr>
+          <a:xfrm>
+            <a:off x="2254649" y="4572000"/>
+            <a:ext cx="685800" cy="219456"/>
+          </a:xfrm>
+          <a:prstGeom prst="rect">
+            <a:avLst/>
+          </a:prstGeom>
+          <a:noFill/>
+          <a:ln/>
+        </p:spPr>
+        <p:txBody>
+          <a:bodyPr wrap="square" lIns="0" tIns="0" rIns="0" bIns="0" rtlCol="0" anchor="t"/>
+          <a:lstStyle/>
+          <a:p>
+            <a:pPr algn="ctr" indent="0" marL="0">
+              <a:buNone/>
+            </a:pPr>
+            <a:r>
+              <a:rPr lang="en-US" sz="750" i="1" dirty="0">
+                <a:solidFill>
+                  <a:srgbClr val="94A3B8"/>
+                </a:solidFill>
+                <a:latin typeface="Calibri" pitchFamily="34" charset="0"/>
+                <a:ea typeface="Calibri" pitchFamily="34" charset="-122"/>
+                <a:cs typeface="Calibri" pitchFamily="34" charset="-120"/>
+              </a:rPr>
+              <a:t>/k/</a:t>
+            </a:r>
+            <a:endParaRPr lang="en-US" sz="750" dirty="0"/>
+          </a:p>
+        </p:txBody>
+      </p:sp>
+      <p:sp>
+        <p:nvSpPr>
+          <p:cNvPr id="37" name="Shape 35"/>
+          <p:cNvSpPr/>
+          <p:nvPr/>
+        </p:nvSpPr>
+        <p:spPr>
+          <a:xfrm>
+            <a:off x="3293146" y="4169664"/>
+            <a:ext cx="685800" cy="384048"/>
           </a:xfrm>
           <a:prstGeom prst="rect">
             <a:avLst>
-              <a:gd name="adj" fmla="val 7692"/>
+              <a:gd name="adj" fmla="val 9524"/>
             </a:avLst>
           </a:prstGeom>
           <a:solidFill>
@@ -27704,14 +27809,14 @@
       </p:sp>
       <p:sp>
         <p:nvSpPr>
-          <p:cNvPr id="36" name="Text 34"/>
-          <p:cNvSpPr/>
-          <p:nvPr/>
-        </p:nvSpPr>
-        <p:spPr>
-          <a:xfrm>
-            <a:off x="3033522" y="4169664"/>
-            <a:ext cx="685800" cy="475488"/>
+          <p:cNvPr id="38" name="Text 36"/>
+          <p:cNvSpPr/>
+          <p:nvPr/>
+        </p:nvSpPr>
+        <p:spPr>
+          <a:xfrm>
+            <a:off x="3293146" y="4169664"/>
+            <a:ext cx="685800" cy="384048"/>
           </a:xfrm>
           <a:prstGeom prst="rect">
             <a:avLst/>
@@ -27735,7 +27840,7 @@
                 <a:ea typeface="Trebuchet MS" pitchFamily="34" charset="-122"/>
                 <a:cs typeface="Trebuchet MS" pitchFamily="34" charset="-120"/>
               </a:rPr>
-              <a:t>i</a:t>
+              <a:t>or</a:t>
             </a:r>
             <a:endParaRPr lang="en-US" sz="900" dirty="0"/>
           </a:p>
@@ -27743,18 +27848,18 @@
       </p:sp>
       <p:sp>
         <p:nvSpPr>
-          <p:cNvPr id="37" name="Shape 35"/>
-          <p:cNvSpPr/>
-          <p:nvPr/>
-        </p:nvSpPr>
-        <p:spPr>
-          <a:xfrm>
-            <a:off x="3942207" y="4169664"/>
-            <a:ext cx="685800" cy="475488"/>
+          <p:cNvPr id="39" name="Shape 37"/>
+          <p:cNvSpPr/>
+          <p:nvPr/>
+        </p:nvSpPr>
+        <p:spPr>
+          <a:xfrm>
+            <a:off x="4331643" y="4169664"/>
+            <a:ext cx="685800" cy="384048"/>
           </a:xfrm>
           <a:prstGeom prst="rect">
             <a:avLst>
-              <a:gd name="adj" fmla="val 7692"/>
+              <a:gd name="adj" fmla="val 9524"/>
             </a:avLst>
           </a:prstGeom>
           <a:solidFill>
@@ -27770,14 +27875,14 @@
       </p:sp>
       <p:sp>
         <p:nvSpPr>
-          <p:cNvPr id="38" name="Text 36"/>
-          <p:cNvSpPr/>
-          <p:nvPr/>
-        </p:nvSpPr>
-        <p:spPr>
-          <a:xfrm>
-            <a:off x="3942207" y="4169664"/>
-            <a:ext cx="685800" cy="475488"/>
+          <p:cNvPr id="40" name="Text 38"/>
+          <p:cNvSpPr/>
+          <p:nvPr/>
+        </p:nvSpPr>
+        <p:spPr>
+          <a:xfrm>
+            <a:off x="4331643" y="4169664"/>
+            <a:ext cx="685800" cy="384048"/>
           </a:xfrm>
           <a:prstGeom prst="rect">
             <a:avLst/>
@@ -27801,7 +27906,7 @@
                 <a:ea typeface="Trebuchet MS" pitchFamily="34" charset="-122"/>
                 <a:cs typeface="Trebuchet MS" pitchFamily="34" charset="-120"/>
               </a:rPr>
-              <a:t>s</a:t>
+              <a:t>r</a:t>
             </a:r>
             <a:endParaRPr lang="en-US" sz="900" dirty="0"/>
           </a:p>
@@ -27809,18 +27914,18 @@
       </p:sp>
       <p:sp>
         <p:nvSpPr>
-          <p:cNvPr id="39" name="Shape 37"/>
-          <p:cNvSpPr/>
-          <p:nvPr/>
-        </p:nvSpPr>
-        <p:spPr>
-          <a:xfrm>
-            <a:off x="4850892" y="4169664"/>
-            <a:ext cx="685800" cy="475488"/>
+          <p:cNvPr id="41" name="Shape 39"/>
+          <p:cNvSpPr/>
+          <p:nvPr/>
+        </p:nvSpPr>
+        <p:spPr>
+          <a:xfrm>
+            <a:off x="5370141" y="4169664"/>
+            <a:ext cx="685800" cy="384048"/>
           </a:xfrm>
           <a:prstGeom prst="rect">
             <a:avLst>
-              <a:gd name="adj" fmla="val 7692"/>
+              <a:gd name="adj" fmla="val 9524"/>
             </a:avLst>
           </a:prstGeom>
           <a:solidFill>
@@ -27836,14 +27941,14 @@
       </p:sp>
       <p:sp>
         <p:nvSpPr>
-          <p:cNvPr id="40" name="Text 38"/>
-          <p:cNvSpPr/>
-          <p:nvPr/>
-        </p:nvSpPr>
-        <p:spPr>
-          <a:xfrm>
-            <a:off x="4850892" y="4169664"/>
-            <a:ext cx="685800" cy="475488"/>
+          <p:cNvPr id="42" name="Text 40"/>
+          <p:cNvSpPr/>
+          <p:nvPr/>
+        </p:nvSpPr>
+        <p:spPr>
+          <a:xfrm>
+            <a:off x="5370141" y="4169664"/>
+            <a:ext cx="685800" cy="384048"/>
           </a:xfrm>
           <a:prstGeom prst="rect">
             <a:avLst/>
@@ -27867,7 +27972,7 @@
                 <a:ea typeface="Trebuchet MS" pitchFamily="34" charset="-122"/>
                 <a:cs typeface="Trebuchet MS" pitchFamily="34" charset="-120"/>
               </a:rPr>
-              <a:t>r</a:t>
+              <a:t>u</a:t>
             </a:r>
             <a:endParaRPr lang="en-US" sz="900" dirty="0"/>
           </a:p>
@@ -27875,18 +27980,18 @@
       </p:sp>
       <p:sp>
         <p:nvSpPr>
-          <p:cNvPr id="41" name="Shape 39"/>
-          <p:cNvSpPr/>
-          <p:nvPr/>
-        </p:nvSpPr>
-        <p:spPr>
-          <a:xfrm>
-            <a:off x="5759577" y="4169664"/>
-            <a:ext cx="685800" cy="475488"/>
+          <p:cNvPr id="43" name="Shape 41"/>
+          <p:cNvSpPr/>
+          <p:nvPr/>
+        </p:nvSpPr>
+        <p:spPr>
+          <a:xfrm>
+            <a:off x="6408638" y="4169664"/>
+            <a:ext cx="685800" cy="384048"/>
           </a:xfrm>
           <a:prstGeom prst="rect">
             <a:avLst>
-              <a:gd name="adj" fmla="val 7692"/>
+              <a:gd name="adj" fmla="val 9524"/>
             </a:avLst>
           </a:prstGeom>
           <a:solidFill>
@@ -27902,14 +28007,14 @@
       </p:sp>
       <p:sp>
         <p:nvSpPr>
-          <p:cNvPr id="42" name="Text 40"/>
-          <p:cNvSpPr/>
-          <p:nvPr/>
-        </p:nvSpPr>
-        <p:spPr>
-          <a:xfrm>
-            <a:off x="5759577" y="4169664"/>
-            <a:ext cx="685800" cy="475488"/>
+          <p:cNvPr id="44" name="Text 42"/>
+          <p:cNvSpPr/>
+          <p:nvPr/>
+        </p:nvSpPr>
+        <p:spPr>
+          <a:xfrm>
+            <a:off x="6408638" y="4169664"/>
+            <a:ext cx="685800" cy="384048"/>
           </a:xfrm>
           <a:prstGeom prst="rect">
             <a:avLst/>
@@ -27933,7 +28038,7 @@
                 <a:ea typeface="Trebuchet MS" pitchFamily="34" charset="-122"/>
                 <a:cs typeface="Trebuchet MS" pitchFamily="34" charset="-120"/>
               </a:rPr>
-              <a:t>u</a:t>
+              <a:t>p</a:t>
             </a:r>
             <a:endParaRPr lang="en-US" sz="900" dirty="0"/>
           </a:p>
@@ -27941,18 +28046,18 @@
       </p:sp>
       <p:sp>
         <p:nvSpPr>
-          <p:cNvPr id="43" name="Shape 41"/>
-          <p:cNvSpPr/>
-          <p:nvPr/>
-        </p:nvSpPr>
-        <p:spPr>
-          <a:xfrm>
-            <a:off x="6668262" y="4169664"/>
-            <a:ext cx="685800" cy="475488"/>
+          <p:cNvPr id="45" name="Shape 43"/>
+          <p:cNvSpPr/>
+          <p:nvPr/>
+        </p:nvSpPr>
+        <p:spPr>
+          <a:xfrm>
+            <a:off x="7447135" y="4169664"/>
+            <a:ext cx="685800" cy="384048"/>
           </a:xfrm>
           <a:prstGeom prst="rect">
             <a:avLst>
-              <a:gd name="adj" fmla="val 7692"/>
+              <a:gd name="adj" fmla="val 9524"/>
             </a:avLst>
           </a:prstGeom>
           <a:solidFill>
@@ -27968,80 +28073,14 @@
       </p:sp>
       <p:sp>
         <p:nvSpPr>
-          <p:cNvPr id="44" name="Text 42"/>
-          <p:cNvSpPr/>
-          <p:nvPr/>
-        </p:nvSpPr>
-        <p:spPr>
-          <a:xfrm>
-            <a:off x="6668262" y="4169664"/>
-            <a:ext cx="685800" cy="475488"/>
-          </a:xfrm>
-          <a:prstGeom prst="rect">
-            <a:avLst/>
-          </a:prstGeom>
-          <a:noFill/>
-          <a:ln/>
-        </p:spPr>
-        <p:txBody>
-          <a:bodyPr wrap="square" lIns="0" tIns="0" rIns="0" bIns="0" rtlCol="0" anchor="ctr"/>
-          <a:lstStyle/>
-          <a:p>
-            <a:pPr algn="ctr" indent="0" marL="0">
-              <a:buNone/>
-            </a:pPr>
-            <a:r>
-              <a:rPr lang="en-US" sz="900" b="1" dirty="0">
-                <a:solidFill>
-                  <a:srgbClr val="9D174D"/>
-                </a:solidFill>
-                <a:latin typeface="Trebuchet MS" pitchFamily="34" charset="0"/>
-                <a:ea typeface="Trebuchet MS" pitchFamily="34" charset="-122"/>
-                <a:cs typeface="Trebuchet MS" pitchFamily="34" charset="-120"/>
-              </a:rPr>
-              <a:t>p</a:t>
-            </a:r>
-            <a:endParaRPr lang="en-US" sz="900" dirty="0"/>
-          </a:p>
-        </p:txBody>
-      </p:sp>
-      <p:sp>
-        <p:nvSpPr>
-          <p:cNvPr id="45" name="Shape 43"/>
-          <p:cNvSpPr/>
-          <p:nvPr/>
-        </p:nvSpPr>
-        <p:spPr>
-          <a:xfrm>
-            <a:off x="7576947" y="4169664"/>
-            <a:ext cx="685800" cy="475488"/>
-          </a:xfrm>
-          <a:prstGeom prst="rect">
-            <a:avLst>
-              <a:gd name="adj" fmla="val 7692"/>
-            </a:avLst>
-          </a:prstGeom>
-          <a:solidFill>
-            <a:srgbClr val="FFFFFF"/>
-          </a:solidFill>
-          <a:ln w="12700">
-            <a:solidFill>
-              <a:srgbClr val="DB2777"/>
-            </a:solidFill>
-            <a:prstDash val="solid"/>
-          </a:ln>
-        </p:spPr>
-      </p:sp>
-      <p:sp>
-        <p:nvSpPr>
           <p:cNvPr id="46" name="Text 44"/>
           <p:cNvSpPr/>
           <p:nvPr/>
         </p:nvSpPr>
         <p:spPr>
           <a:xfrm>
-            <a:off x="7576947" y="4169664"/>
-            <a:ext cx="685800" cy="475488"/>
+            <a:off x="7447135" y="4169664"/>
+            <a:ext cx="685800" cy="384048"/>
           </a:xfrm>
           <a:prstGeom prst="rect">
             <a:avLst/>
@@ -28357,7 +28396,7 @@
                 <a:ea typeface="Calibri" pitchFamily="34" charset="-122"/>
                 <a:cs typeface="Calibri" pitchFamily="34" charset="-120"/>
               </a:rPr>
-              <a:t>Word Labs  •  wordlabs.app  •  Root: 'rupt' = break, burst, force through</a:t>
+              <a:t>Word Labs  •  wordlabs.app  •  Root: 'rupt' = break, burst, or shatter</a:t>
             </a:r>
             <a:endParaRPr lang="en-US" sz="800" dirty="0"/>
           </a:p>
@@ -29184,7 +29223,7 @@
                 <a:ea typeface="Calibri" pitchFamily="34" charset="-122"/>
                 <a:cs typeface="Calibri" pitchFamily="34" charset="-120"/>
               </a:rPr>
-              <a:t>Word Labs  •  wordlabs.app  •  Root: 'rupt' = break, burst, force through</a:t>
+              <a:t>Word Labs  •  wordlabs.app  •  Root: 'rupt' = break, burst, or shatter</a:t>
             </a:r>
             <a:endParaRPr lang="en-US" sz="800" dirty="0"/>
           </a:p>
@@ -29501,7 +29540,7 @@
                 <a:ea typeface="Calibri" pitchFamily="34" charset="-122"/>
                 <a:cs typeface="Calibri" pitchFamily="34" charset="-120"/>
               </a:rPr>
-              <a:t>away from, off</a:t>
+              <a:t>away from</a:t>
             </a:r>
             <a:endParaRPr lang="en-US" sz="850" dirty="0"/>
           </a:p>
@@ -30169,7 +30208,7 @@
                 <a:ea typeface="Calibri" pitchFamily="34" charset="-122"/>
                 <a:cs typeface="Calibri" pitchFamily="34" charset="-120"/>
               </a:rPr>
-              <a:t>Word Labs  •  wordlabs.app  •  Root: 'rupt' = break, burst, force through</a:t>
+              <a:t>Word Labs  •  wordlabs.app  •  Root: 'rupt' = break, burst, or shatter</a:t>
             </a:r>
             <a:endParaRPr lang="en-US" sz="800" dirty="0"/>
           </a:p>
@@ -30486,7 +30525,7 @@
                 <a:ea typeface="Calibri" pitchFamily="34" charset="-122"/>
                 <a:cs typeface="Calibri" pitchFamily="34" charset="-120"/>
               </a:rPr>
-              <a:t>away from, off</a:t>
+              <a:t>away from</a:t>
             </a:r>
             <a:endParaRPr lang="en-US" sz="850" dirty="0"/>
           </a:p>
@@ -31286,7 +31325,7 @@
                 <a:ea typeface="Calibri" pitchFamily="34" charset="-122"/>
                 <a:cs typeface="Calibri" pitchFamily="34" charset="-120"/>
               </a:rPr>
-              <a:t>Word Labs  •  wordlabs.app  •  Root: 'rupt' = break, burst, force through</a:t>
+              <a:t>Word Labs  •  wordlabs.app  •  Root: 'rupt' = break, burst, or shatter</a:t>
             </a:r>
             <a:endParaRPr lang="en-US" sz="800" dirty="0"/>
           </a:p>
@@ -31603,7 +31642,7 @@
                 <a:ea typeface="Calibri" pitchFamily="34" charset="-122"/>
                 <a:cs typeface="Calibri" pitchFamily="34" charset="-120"/>
               </a:rPr>
-              <a:t>away from, off</a:t>
+              <a:t>away from</a:t>
             </a:r>
             <a:endParaRPr lang="en-US" sz="850" dirty="0"/>
           </a:p>
@@ -32760,7 +32799,7 @@
                 <a:ea typeface="Calibri" pitchFamily="34" charset="-122"/>
                 <a:cs typeface="Calibri" pitchFamily="34" charset="-120"/>
               </a:rPr>
-              <a:t>Word Labs  •  wordlabs.app  •  Root: 'rupt' = break, burst, force through</a:t>
+              <a:t>Word Labs  •  wordlabs.app  •  Root: 'rupt' = break, burst, or shatter</a:t>
             </a:r>
             <a:endParaRPr lang="en-US" sz="800" dirty="0"/>
           </a:p>
@@ -33929,7 +33968,7 @@
                 <a:ea typeface="Calibri" pitchFamily="34" charset="-122"/>
                 <a:cs typeface="Calibri" pitchFamily="34" charset="-120"/>
               </a:rPr>
-              <a:t>Word Labs  •  wordlabs.app  •  Root: 'rupt' = break, burst, force through</a:t>
+              <a:t>Word Labs  •  wordlabs.app  •  Root: 'rupt' = break, burst, or shatter</a:t>
             </a:r>
             <a:endParaRPr lang="en-US" sz="800" dirty="0"/>
           </a:p>
@@ -34230,7 +34269,7 @@
                 <a:ea typeface="Trebuchet MS" pitchFamily="34" charset="-122"/>
                 <a:cs typeface="Trebuchet MS" pitchFamily="34" charset="-120"/>
               </a:rPr>
-              <a:t>in-</a:t>
+              <a:t>inter-</a:t>
             </a:r>
             <a:endParaRPr lang="en-US" sz="1300" dirty="0"/>
           </a:p>
@@ -34728,7 +34767,7 @@
                 <a:ea typeface="Trebuchet MS" pitchFamily="34" charset="-122"/>
                 <a:cs typeface="Trebuchet MS" pitchFamily="34" charset="-120"/>
               </a:rPr>
-              <a:t>ab-</a:t>
+              <a:t>e-</a:t>
             </a:r>
             <a:endParaRPr lang="en-US" sz="1300" dirty="0"/>
           </a:p>
@@ -34881,7 +34920,7 @@
                 <a:ea typeface="Trebuchet MS" pitchFamily="34" charset="-122"/>
                 <a:cs typeface="Trebuchet MS" pitchFamily="34" charset="-120"/>
               </a:rPr>
-              <a:t>e-</a:t>
+              <a:t>ab-</a:t>
             </a:r>
             <a:endParaRPr lang="en-US" sz="1300" dirty="0"/>
           </a:p>
@@ -35141,7 +35180,7 @@
                 <a:ea typeface="Trebuchet MS" pitchFamily="34" charset="-122"/>
                 <a:cs typeface="Trebuchet MS" pitchFamily="34" charset="-120"/>
               </a:rPr>
-              <a:t>erupt</a:t>
+              <a:t>disrupt</a:t>
             </a:r>
             <a:endParaRPr lang="en-US" sz="1200" dirty="0"/>
           </a:p>
@@ -35207,7 +35246,7 @@
                 <a:ea typeface="Trebuchet MS" pitchFamily="34" charset="-122"/>
                 <a:cs typeface="Trebuchet MS" pitchFamily="34" charset="-120"/>
               </a:rPr>
-              <a:t>disrupt</a:t>
+              <a:t>erupt</a:t>
             </a:r>
             <a:endParaRPr lang="en-US" sz="1200" dirty="0"/>
           </a:p>
@@ -35339,7 +35378,7 @@
                 <a:ea typeface="Trebuchet MS" pitchFamily="34" charset="-122"/>
                 <a:cs typeface="Trebuchet MS" pitchFamily="34" charset="-120"/>
               </a:rPr>
-              <a:t>abrupt</a:t>
+              <a:t>rupture</a:t>
             </a:r>
             <a:endParaRPr lang="en-US" sz="1200" dirty="0"/>
           </a:p>
@@ -35405,7 +35444,7 @@
                 <a:ea typeface="Trebuchet MS" pitchFamily="34" charset="-122"/>
                 <a:cs typeface="Trebuchet MS" pitchFamily="34" charset="-120"/>
               </a:rPr>
-              <a:t>eruption</a:t>
+              <a:t>abrupt</a:t>
             </a:r>
             <a:endParaRPr lang="en-US" sz="1200" dirty="0"/>
           </a:p>
@@ -35471,7 +35510,7 @@
                 <a:ea typeface="Trebuchet MS" pitchFamily="34" charset="-122"/>
                 <a:cs typeface="Trebuchet MS" pitchFamily="34" charset="-120"/>
               </a:rPr>
-              <a:t>disruption</a:t>
+              <a:t>eruption</a:t>
             </a:r>
             <a:endParaRPr lang="en-US" sz="1200" dirty="0"/>
           </a:p>
@@ -35829,7 +35868,7 @@
                 <a:ea typeface="Calibri" pitchFamily="34" charset="-122"/>
                 <a:cs typeface="Calibri" pitchFamily="34" charset="-120"/>
               </a:rPr>
-              <a:t>Word Labs  •  wordlabs.app  •  Root: 'rupt' = break, burst, force through</a:t>
+              <a:t>Word Labs  •  wordlabs.app  •  Root: 'rupt' = break, burst, or shatter</a:t>
             </a:r>
             <a:endParaRPr lang="en-US" sz="800" dirty="0"/>
           </a:p>
@@ -35993,7 +36032,7 @@
                 <a:ea typeface="Calibri" pitchFamily="34" charset="-122"/>
                 <a:cs typeface="Calibri" pitchFamily="34" charset="-120"/>
               </a:rPr>
-              <a:t>The core part of a word carrying its basic meaning. For example, 'rupt' means 'break, burst, force through'.</a:t>
+              <a:t>The core part of a word carrying its basic meaning. For example, 'rupt' means 'break, burst, or shatter'.</a:t>
             </a:r>
             <a:endParaRPr lang="en-US" sz="1350" dirty="0"/>
           </a:p>
@@ -36613,7 +36652,7 @@
                 <a:ea typeface="Calibri" pitchFamily="34" charset="-122"/>
                 <a:cs typeface="Calibri" pitchFamily="34" charset="-120"/>
               </a:rPr>
-              <a:t>Word Labs  •  wordlabs.app  •  Root: 'rupt' = break, burst, force through</a:t>
+              <a:t>Word Labs  •  wordlabs.app  •  Root: 'rupt' = break, burst, or shatter</a:t>
             </a:r>
             <a:endParaRPr lang="en-US" sz="800" dirty="0"/>
           </a:p>
@@ -36725,7 +36764,7 @@
                 <a:ea typeface="Calibri" pitchFamily="34" charset="-122"/>
                 <a:cs typeface="Calibri" pitchFamily="34" charset="-120"/>
               </a:rPr>
-              <a:t>1.  The root 'rupt' comes from a Latin word meaning to break or burst.</a:t>
+              <a:t>1.  The prefix 'inter' in 'interrupt' means between or among.</a:t>
             </a:r>
             <a:endParaRPr lang="en-US" sz="1300" dirty="0"/>
           </a:p>
@@ -36864,7 +36903,7 @@
                 <a:ea typeface="Calibri" pitchFamily="34" charset="-122"/>
                 <a:cs typeface="Calibri" pitchFamily="34" charset="-120"/>
               </a:rPr>
-              <a:t>2.  The word 'erupt' means to fix or repair something carefully.</a:t>
+              <a:t>2.  The word 'erupt' has nothing to do with the root 'rupt'.</a:t>
             </a:r>
             <a:endParaRPr lang="en-US" sz="1300" dirty="0"/>
           </a:p>
@@ -37003,7 +37042,7 @@
                 <a:ea typeface="Calibri" pitchFamily="34" charset="-122"/>
                 <a:cs typeface="Calibri" pitchFamily="34" charset="-120"/>
               </a:rPr>
-              <a:t>3.  The word 'interrupt' contains the root 'rupt' meaning break.</a:t>
+              <a:t>3.  The root 'rupt' comes from a Latin word meaning to break or burst.</a:t>
             </a:r>
             <a:endParaRPr lang="en-US" sz="1300" dirty="0"/>
           </a:p>
@@ -37142,7 +37181,7 @@
                 <a:ea typeface="Calibri" pitchFamily="34" charset="-122"/>
                 <a:cs typeface="Calibri" pitchFamily="34" charset="-120"/>
               </a:rPr>
-              <a:t>4.  A volcano eruption is an example of something bursting or breaking open.</a:t>
+              <a:t>4.  A 'rupture' is a type of break or tear in something.</a:t>
             </a:r>
             <a:endParaRPr lang="en-US" sz="1300" dirty="0"/>
           </a:p>
@@ -37281,7 +37320,7 @@
                 <a:ea typeface="Calibri" pitchFamily="34" charset="-122"/>
                 <a:cs typeface="Calibri" pitchFamily="34" charset="-120"/>
               </a:rPr>
-              <a:t>5.  The root 'rupt' originally came from the Greek language.</a:t>
+              <a:t>5.  The word 'disrupt' means to make something run more smoothly.</a:t>
             </a:r>
             <a:endParaRPr lang="en-US" sz="1300" dirty="0"/>
           </a:p>
@@ -37639,7 +37678,7 @@
                 <a:ea typeface="Calibri" pitchFamily="34" charset="-122"/>
                 <a:cs typeface="Calibri" pitchFamily="34" charset="-120"/>
               </a:rPr>
-              <a:t>Word Labs  •  wordlabs.app  •  Root: 'rupt' = break, burst, force through</a:t>
+              <a:t>Word Labs  •  wordlabs.app  •  Root: 'rupt' = break, burst, or shatter</a:t>
             </a:r>
             <a:endParaRPr lang="en-US" sz="800" dirty="0"/>
           </a:p>
@@ -37776,7 +37815,7 @@
                 <a:ea typeface="Trebuchet MS" pitchFamily="34" charset="-122"/>
                 <a:cs typeface="Trebuchet MS" pitchFamily="34" charset="-120"/>
               </a:rPr>
-              <a:t>break, burst, force through</a:t>
+              <a:t>break, burst, or shatter</a:t>
             </a:r>
             <a:endParaRPr lang="en-US" sz="2000" dirty="0"/>
           </a:p>
@@ -37986,7 +38025,7 @@
                 <a:ea typeface="Trebuchet MS" pitchFamily="34" charset="-122"/>
                 <a:cs typeface="Trebuchet MS" pitchFamily="34" charset="-120"/>
               </a:rPr>
-              <a:t>erupt</a:t>
+              <a:t>disrupt</a:t>
             </a:r>
             <a:endParaRPr lang="en-US" sz="1300" dirty="0"/>
           </a:p>
@@ -38052,7 +38091,7 @@
                 <a:ea typeface="Trebuchet MS" pitchFamily="34" charset="-122"/>
                 <a:cs typeface="Trebuchet MS" pitchFamily="34" charset="-120"/>
               </a:rPr>
-              <a:t>disrupt</a:t>
+              <a:t>erupt</a:t>
             </a:r>
             <a:endParaRPr lang="en-US" sz="1300" dirty="0"/>
           </a:p>
@@ -38184,7 +38223,7 @@
                 <a:ea typeface="Trebuchet MS" pitchFamily="34" charset="-122"/>
                 <a:cs typeface="Trebuchet MS" pitchFamily="34" charset="-120"/>
               </a:rPr>
-              <a:t>abrupt</a:t>
+              <a:t>rupture</a:t>
             </a:r>
             <a:endParaRPr lang="en-US" sz="1300" dirty="0"/>
           </a:p>
@@ -38250,7 +38289,7 @@
                 <a:ea typeface="Trebuchet MS" pitchFamily="34" charset="-122"/>
                 <a:cs typeface="Trebuchet MS" pitchFamily="34" charset="-120"/>
               </a:rPr>
-              <a:t>eruption</a:t>
+              <a:t>abrupt</a:t>
             </a:r>
             <a:endParaRPr lang="en-US" sz="1300" dirty="0"/>
           </a:p>
@@ -38316,7 +38355,7 @@
                 <a:ea typeface="Trebuchet MS" pitchFamily="34" charset="-122"/>
                 <a:cs typeface="Trebuchet MS" pitchFamily="34" charset="-120"/>
               </a:rPr>
-              <a:t>disruption</a:t>
+              <a:t>eruption</a:t>
             </a:r>
             <a:endParaRPr lang="en-US" sz="1300" dirty="0"/>
           </a:p>
@@ -38608,7 +38647,7 @@
                 <a:ea typeface="Calibri" pitchFamily="34" charset="-122"/>
                 <a:cs typeface="Calibri" pitchFamily="34" charset="-120"/>
               </a:rPr>
-              <a:t>Word Labs  •  wordlabs.app  •  Root: 'rupt' = break, burst, force through</a:t>
+              <a:t>Word Labs  •  wordlabs.app  •  Root: 'rupt' = break, burst, or shatter</a:t>
             </a:r>
             <a:endParaRPr lang="en-US" sz="800" dirty="0"/>
           </a:p>
@@ -38909,7 +38948,7 @@
                 <a:ea typeface="Trebuchet MS" pitchFamily="34" charset="-122"/>
                 <a:cs typeface="Trebuchet MS" pitchFamily="34" charset="-120"/>
               </a:rPr>
-              <a:t>in-</a:t>
+              <a:t>inter-</a:t>
             </a:r>
             <a:endParaRPr lang="en-US" sz="1300" dirty="0"/>
           </a:p>
@@ -39407,7 +39446,7 @@
                 <a:ea typeface="Trebuchet MS" pitchFamily="34" charset="-122"/>
                 <a:cs typeface="Trebuchet MS" pitchFamily="34" charset="-120"/>
               </a:rPr>
-              <a:t>ab-</a:t>
+              <a:t>e-</a:t>
             </a:r>
             <a:endParaRPr lang="en-US" sz="1300" dirty="0"/>
           </a:p>
@@ -39560,7 +39599,7 @@
                 <a:ea typeface="Trebuchet MS" pitchFamily="34" charset="-122"/>
                 <a:cs typeface="Trebuchet MS" pitchFamily="34" charset="-120"/>
               </a:rPr>
-              <a:t>e-</a:t>
+              <a:t>ab-</a:t>
             </a:r>
             <a:endParaRPr lang="en-US" sz="1300" dirty="0"/>
           </a:p>
@@ -39703,7 +39742,7 @@
         <p:spPr>
           <a:xfrm>
             <a:off x="1508760" y="4178808"/>
-            <a:ext cx="822960" cy="420624"/>
+            <a:ext cx="1243584" cy="420624"/>
           </a:xfrm>
           <a:prstGeom prst="rect">
             <a:avLst>
@@ -39737,7 +39776,7 @@
         <p:spPr>
           <a:xfrm>
             <a:off x="1508760" y="4178808"/>
-            <a:ext cx="822960" cy="420624"/>
+            <a:ext cx="1243584" cy="420624"/>
           </a:xfrm>
           <a:prstGeom prst="rect">
             <a:avLst/>
@@ -39761,7 +39800,7 @@
                 <a:ea typeface="Trebuchet MS" pitchFamily="34" charset="-122"/>
                 <a:cs typeface="Trebuchet MS" pitchFamily="34" charset="-120"/>
               </a:rPr>
-              <a:t>in-</a:t>
+              <a:t>inter-</a:t>
             </a:r>
             <a:endParaRPr lang="en-US" sz="1300" dirty="0"/>
           </a:p>
@@ -39775,7 +39814,7 @@
         </p:nvSpPr>
         <p:spPr>
           <a:xfrm>
-            <a:off x="2359152" y="4178808"/>
+            <a:off x="2779776" y="4178808"/>
             <a:ext cx="320040" cy="420624"/>
           </a:xfrm>
           <a:prstGeom prst="rect">
@@ -39814,7 +39853,7 @@
         </p:nvSpPr>
         <p:spPr>
           <a:xfrm>
-            <a:off x="2706624" y="4178808"/>
+            <a:off x="3127248" y="4178808"/>
             <a:ext cx="1243584" cy="420624"/>
           </a:xfrm>
           <a:prstGeom prst="rect">
@@ -39848,7 +39887,7 @@
         </p:nvSpPr>
         <p:spPr>
           <a:xfrm>
-            <a:off x="2706624" y="4178808"/>
+            <a:off x="3127248" y="4178808"/>
             <a:ext cx="1243584" cy="420624"/>
           </a:xfrm>
           <a:prstGeom prst="rect">
@@ -39887,7 +39926,7 @@
         </p:nvSpPr>
         <p:spPr>
           <a:xfrm>
-            <a:off x="3977640" y="4178808"/>
+            <a:off x="4398264" y="4178808"/>
             <a:ext cx="320040" cy="420624"/>
           </a:xfrm>
           <a:prstGeom prst="rect">
@@ -39926,7 +39965,7 @@
         </p:nvSpPr>
         <p:spPr>
           <a:xfrm>
-            <a:off x="4325112" y="4178808"/>
+            <a:off x="4745736" y="4178808"/>
             <a:ext cx="950976" cy="420624"/>
           </a:xfrm>
           <a:prstGeom prst="rect">
@@ -39960,7 +39999,7 @@
         </p:nvSpPr>
         <p:spPr>
           <a:xfrm>
-            <a:off x="4325112" y="4178808"/>
+            <a:off x="4745736" y="4178808"/>
             <a:ext cx="950976" cy="420624"/>
           </a:xfrm>
           <a:prstGeom prst="rect">
@@ -39999,7 +40038,7 @@
         </p:nvSpPr>
         <p:spPr>
           <a:xfrm>
-            <a:off x="5349240" y="4178808"/>
+            <a:off x="5769864" y="4178808"/>
             <a:ext cx="365760" cy="420624"/>
           </a:xfrm>
           <a:prstGeom prst="rect">
@@ -40038,7 +40077,7 @@
         </p:nvSpPr>
         <p:spPr>
           <a:xfrm>
-            <a:off x="5760720" y="4178808"/>
+            <a:off x="6181344" y="4178808"/>
             <a:ext cx="2194560" cy="420624"/>
           </a:xfrm>
           <a:prstGeom prst="rect">
@@ -40065,7 +40104,7 @@
         </p:nvSpPr>
         <p:spPr>
           <a:xfrm>
-            <a:off x="5760720" y="4178808"/>
+            <a:off x="6181344" y="4178808"/>
             <a:ext cx="2194560" cy="420624"/>
           </a:xfrm>
           <a:prstGeom prst="rect">
@@ -40382,7 +40421,7 @@
                 <a:ea typeface="Calibri" pitchFamily="34" charset="-122"/>
                 <a:cs typeface="Calibri" pitchFamily="34" charset="-120"/>
               </a:rPr>
-              <a:t>Word Labs  •  wordlabs.app  •  Root: 'rupt' = break, burst, force through</a:t>
+              <a:t>Word Labs  •  wordlabs.app  •  Root: 'rupt' = break, burst, or shatter</a:t>
             </a:r>
             <a:endParaRPr lang="en-US" sz="800" dirty="0"/>
           </a:p>
@@ -40560,7 +40599,7 @@
                 <a:ea typeface="Calibri" pitchFamily="34" charset="-122"/>
                 <a:cs typeface="Calibri" pitchFamily="34" charset="-120"/>
               </a:rPr>
-              <a:t>Something that happens suddenly and unexpectedly, without warning.</a:t>
+              <a:t>A break or tear in something, like a burst pipe or torn muscle.</a:t>
             </a:r>
             <a:endParaRPr lang="en-US" sz="1200" dirty="0"/>
           </a:p>
@@ -40633,7 +40672,7 @@
                 <a:ea typeface="Trebuchet MS" pitchFamily="34" charset="-122"/>
                 <a:cs typeface="Trebuchet MS" pitchFamily="34" charset="-120"/>
               </a:rPr>
-              <a:t>erupt</a:t>
+              <a:t>disrupt</a:t>
             </a:r>
             <a:endParaRPr lang="en-US" sz="1200" dirty="0"/>
           </a:p>
@@ -40699,7 +40738,7 @@
                 <a:ea typeface="Calibri" pitchFamily="34" charset="-122"/>
                 <a:cs typeface="Calibri" pitchFamily="34" charset="-120"/>
               </a:rPr>
-              <a:t>Something that has been broken or spoiled, or a person who acts dishonestly.</a:t>
+              <a:t>To break down someone's honesty or goodness, making them act dishonestly.</a:t>
             </a:r>
             <a:endParaRPr lang="en-US" sz="1200" dirty="0"/>
           </a:p>
@@ -40772,7 +40811,7 @@
                 <a:ea typeface="Trebuchet MS" pitchFamily="34" charset="-122"/>
                 <a:cs typeface="Trebuchet MS" pitchFamily="34" charset="-120"/>
               </a:rPr>
-              <a:t>disrupt</a:t>
+              <a:t>erupt</a:t>
             </a:r>
             <a:endParaRPr lang="en-US" sz="1200" dirty="0"/>
           </a:p>
@@ -40838,7 +40877,7 @@
                 <a:ea typeface="Calibri" pitchFamily="34" charset="-122"/>
                 <a:cs typeface="Calibri" pitchFamily="34" charset="-120"/>
               </a:rPr>
-              <a:t>To break apart the normal flow of something, causing confusion or disorder.</a:t>
+              <a:t>To burst out suddenly, like a volcano shooting out lava and ash.</a:t>
             </a:r>
             <a:endParaRPr lang="en-US" sz="1200" dirty="0"/>
           </a:p>
@@ -40977,7 +41016,7 @@
                 <a:ea typeface="Calibri" pitchFamily="34" charset="-122"/>
                 <a:cs typeface="Calibri" pitchFamily="34" charset="-120"/>
               </a:rPr>
-              <a:t>When the normal order of something is broken up and causes problems.</a:t>
+              <a:t>A sudden violent burst, like when a volcano explodes with hot lava.</a:t>
             </a:r>
             <a:endParaRPr lang="en-US" sz="1200" dirty="0"/>
           </a:p>
@@ -41050,7 +41089,7 @@
                 <a:ea typeface="Trebuchet MS" pitchFamily="34" charset="-122"/>
                 <a:cs typeface="Trebuchet MS" pitchFamily="34" charset="-120"/>
               </a:rPr>
-              <a:t>abrupt</a:t>
+              <a:t>rupture</a:t>
             </a:r>
             <a:endParaRPr lang="en-US" sz="1200" dirty="0"/>
           </a:p>
@@ -41116,7 +41155,7 @@
                 <a:ea typeface="Calibri" pitchFamily="34" charset="-122"/>
                 <a:cs typeface="Calibri" pitchFamily="34" charset="-120"/>
               </a:rPr>
-              <a:t>To break into what someone is doing or saying, stopping them suddenly.</a:t>
+              <a:t>To break into a conversation or activity and stop it for a moment.</a:t>
             </a:r>
             <a:endParaRPr lang="en-US" sz="1200" dirty="0"/>
           </a:p>
@@ -41189,7 +41228,7 @@
                 <a:ea typeface="Trebuchet MS" pitchFamily="34" charset="-122"/>
                 <a:cs typeface="Trebuchet MS" pitchFamily="34" charset="-120"/>
               </a:rPr>
-              <a:t>eruption</a:t>
+              <a:t>abrupt</a:t>
             </a:r>
             <a:endParaRPr lang="en-US" sz="1200" dirty="0"/>
           </a:p>
@@ -41255,7 +41294,7 @@
                 <a:ea typeface="Calibri" pitchFamily="34" charset="-122"/>
                 <a:cs typeface="Calibri" pitchFamily="34" charset="-120"/>
               </a:rPr>
-              <a:t>The sudden bursting out of a volcano, or any sudden fierce outburst.</a:t>
+              <a:t>Suddenly stopping or changing without any warning, like an abrupt halt.</a:t>
             </a:r>
             <a:endParaRPr lang="en-US" sz="1200" dirty="0"/>
           </a:p>
@@ -41328,7 +41367,7 @@
                 <a:ea typeface="Trebuchet MS" pitchFamily="34" charset="-122"/>
                 <a:cs typeface="Trebuchet MS" pitchFamily="34" charset="-120"/>
               </a:rPr>
-              <a:t>disruption</a:t>
+              <a:t>eruption</a:t>
             </a:r>
             <a:endParaRPr lang="en-US" sz="1200" dirty="0"/>
           </a:p>
@@ -41394,7 +41433,7 @@
                 <a:ea typeface="Calibri" pitchFamily="34" charset="-122"/>
                 <a:cs typeface="Calibri" pitchFamily="34" charset="-120"/>
               </a:rPr>
-              <a:t>When a volcano bursts open and shoots out lava, ash, and rock.</a:t>
+              <a:t>To cause confusion or disorder by breaking up something that was happening smoothly.</a:t>
             </a:r>
             <a:endParaRPr lang="en-US" sz="1200" dirty="0"/>
           </a:p>
@@ -41686,7 +41725,7 @@
                 <a:ea typeface="Calibri" pitchFamily="34" charset="-122"/>
                 <a:cs typeface="Calibri" pitchFamily="34" charset="-120"/>
               </a:rPr>
-              <a:t>Word Labs  •  wordlabs.app  •  Root: 'rupt' = break, burst, force through</a:t>
+              <a:t>Word Labs  •  wordlabs.app  •  Root: 'rupt' = break, burst, or shatter</a:t>
             </a:r>
             <a:endParaRPr lang="en-US" sz="800" dirty="0"/>
           </a:p>
@@ -41889,7 +41928,7 @@
                 <a:ea typeface="Calibri" pitchFamily="34" charset="-122"/>
                 <a:cs typeface="Calibri" pitchFamily="34" charset="-120"/>
               </a:rPr>
-              <a:t>The loud thunderclap seemed to interrupt the teacher right in the middle of the lesson.</a:t>
+              <a:t>The volcano began to erupt without any warning, sending ash high into the sky.</a:t>
             </a:r>
             <a:endParaRPr lang="en-US" sz="1500" dirty="0"/>
           </a:p>
@@ -42053,7 +42092,7 @@
                 <a:ea typeface="Calibri" pitchFamily="34" charset="-122"/>
                 <a:cs typeface="Calibri" pitchFamily="34" charset="-120"/>
               </a:rPr>
-              <a:t>Scientists watched carefully as the volcano began to erupt, sending ash high into the sky.</a:t>
+              <a:t>Please do not interrupt your classmate when they are sharing their ideas with the group.</a:t>
             </a:r>
             <a:endParaRPr lang="en-US" sz="1500" dirty="0"/>
           </a:p>
@@ -42217,7 +42256,7 @@
                 <a:ea typeface="Calibri" pitchFamily="34" charset="-122"/>
                 <a:cs typeface="Calibri" pitchFamily="34" charset="-120"/>
               </a:rPr>
-              <a:t>The fire drill caused a disruption to our maths class, but everyone got outside safely.</a:t>
+              <a:t>The sudden storm managed to disrupt our outdoor sports carnival completely.</a:t>
             </a:r>
             <a:endParaRPr lang="en-US" sz="1500" dirty="0"/>
           </a:p>
